--- a/Docs.pptx
+++ b/Docs.pptx
@@ -8,6 +8,7 @@
     <p:sldId id="256" r:id="rId2"/>
     <p:sldId id="257" r:id="rId3"/>
     <p:sldId id="258" r:id="rId4"/>
+    <p:sldId id="259" r:id="rId5"/>
   </p:sldIdLst>
   <p:sldSz cx="12192000" cy="6858000"/>
   <p:notesSz cx="6858000" cy="9144000"/>
@@ -106,6 +107,11 @@
       </a:defRPr>
     </a:lvl9pPr>
   </p:defaultTextStyle>
+  <p:extLst>
+    <p:ext uri="{EFAFB233-063F-42B5-8137-9DF3F51BA10A}">
+      <p15:sldGuideLst xmlns:p15="http://schemas.microsoft.com/office/powerpoint/2012/main"/>
+    </p:ext>
+  </p:extLst>
 </p:presentation>
 </file>
 
@@ -256,7 +262,7 @@
           <a:p>
             <a:fld id="{191EFF39-64BE-4380-8A53-06CF69B4C7AB}" type="datetimeFigureOut">
               <a:rPr lang="de-DE" smtClean="0"/>
-              <a:t>13.07.2026</a:t>
+              <a:t>15.07.2026</a:t>
             </a:fld>
             <a:endParaRPr lang="de-DE"/>
           </a:p>
@@ -454,7 +460,7 @@
           <a:p>
             <a:fld id="{191EFF39-64BE-4380-8A53-06CF69B4C7AB}" type="datetimeFigureOut">
               <a:rPr lang="de-DE" smtClean="0"/>
-              <a:t>13.07.2026</a:t>
+              <a:t>15.07.2026</a:t>
             </a:fld>
             <a:endParaRPr lang="de-DE"/>
           </a:p>
@@ -662,7 +668,7 @@
           <a:p>
             <a:fld id="{191EFF39-64BE-4380-8A53-06CF69B4C7AB}" type="datetimeFigureOut">
               <a:rPr lang="de-DE" smtClean="0"/>
-              <a:t>13.07.2026</a:t>
+              <a:t>15.07.2026</a:t>
             </a:fld>
             <a:endParaRPr lang="de-DE"/>
           </a:p>
@@ -860,7 +866,7 @@
           <a:p>
             <a:fld id="{191EFF39-64BE-4380-8A53-06CF69B4C7AB}" type="datetimeFigureOut">
               <a:rPr lang="de-DE" smtClean="0"/>
-              <a:t>13.07.2026</a:t>
+              <a:t>15.07.2026</a:t>
             </a:fld>
             <a:endParaRPr lang="de-DE"/>
           </a:p>
@@ -1135,7 +1141,7 @@
           <a:p>
             <a:fld id="{191EFF39-64BE-4380-8A53-06CF69B4C7AB}" type="datetimeFigureOut">
               <a:rPr lang="de-DE" smtClean="0"/>
-              <a:t>13.07.2026</a:t>
+              <a:t>15.07.2026</a:t>
             </a:fld>
             <a:endParaRPr lang="de-DE"/>
           </a:p>
@@ -1400,7 +1406,7 @@
           <a:p>
             <a:fld id="{191EFF39-64BE-4380-8A53-06CF69B4C7AB}" type="datetimeFigureOut">
               <a:rPr lang="de-DE" smtClean="0"/>
-              <a:t>13.07.2026</a:t>
+              <a:t>15.07.2026</a:t>
             </a:fld>
             <a:endParaRPr lang="de-DE"/>
           </a:p>
@@ -1812,7 +1818,7 @@
           <a:p>
             <a:fld id="{191EFF39-64BE-4380-8A53-06CF69B4C7AB}" type="datetimeFigureOut">
               <a:rPr lang="de-DE" smtClean="0"/>
-              <a:t>13.07.2026</a:t>
+              <a:t>15.07.2026</a:t>
             </a:fld>
             <a:endParaRPr lang="de-DE"/>
           </a:p>
@@ -1953,7 +1959,7 @@
           <a:p>
             <a:fld id="{191EFF39-64BE-4380-8A53-06CF69B4C7AB}" type="datetimeFigureOut">
               <a:rPr lang="de-DE" smtClean="0"/>
-              <a:t>13.07.2026</a:t>
+              <a:t>15.07.2026</a:t>
             </a:fld>
             <a:endParaRPr lang="de-DE"/>
           </a:p>
@@ -2066,7 +2072,7 @@
           <a:p>
             <a:fld id="{191EFF39-64BE-4380-8A53-06CF69B4C7AB}" type="datetimeFigureOut">
               <a:rPr lang="de-DE" smtClean="0"/>
-              <a:t>13.07.2026</a:t>
+              <a:t>15.07.2026</a:t>
             </a:fld>
             <a:endParaRPr lang="de-DE"/>
           </a:p>
@@ -2377,7 +2383,7 @@
           <a:p>
             <a:fld id="{191EFF39-64BE-4380-8A53-06CF69B4C7AB}" type="datetimeFigureOut">
               <a:rPr lang="de-DE" smtClean="0"/>
-              <a:t>13.07.2026</a:t>
+              <a:t>15.07.2026</a:t>
             </a:fld>
             <a:endParaRPr lang="de-DE"/>
           </a:p>
@@ -2665,7 +2671,7 @@
           <a:p>
             <a:fld id="{191EFF39-64BE-4380-8A53-06CF69B4C7AB}" type="datetimeFigureOut">
               <a:rPr lang="de-DE" smtClean="0"/>
-              <a:t>13.07.2026</a:t>
+              <a:t>15.07.2026</a:t>
             </a:fld>
             <a:endParaRPr lang="de-DE"/>
           </a:p>
@@ -2906,7 +2912,7 @@
           <a:p>
             <a:fld id="{191EFF39-64BE-4380-8A53-06CF69B4C7AB}" type="datetimeFigureOut">
               <a:rPr lang="de-DE" smtClean="0"/>
-              <a:t>13.07.2026</a:t>
+              <a:t>15.07.2026</a:t>
             </a:fld>
             <a:endParaRPr lang="de-DE"/>
           </a:p>
@@ -6747,6 +6753,2310 @@
     <p:extLst>
       <p:ext uri="{BB962C8B-B14F-4D97-AF65-F5344CB8AC3E}">
         <p14:creationId xmlns:p14="http://schemas.microsoft.com/office/powerpoint/2010/main" val="2258687492"/>
+      </p:ext>
+    </p:extLst>
+  </p:cSld>
+  <p:clrMapOvr>
+    <a:masterClrMapping/>
+  </p:clrMapOvr>
+</p:sld>
+</file>
+
+<file path=ppt/slides/slide4.xml><?xml version="1.0" encoding="utf-8"?>
+<p:sld xmlns:a="http://schemas.openxmlformats.org/drawingml/2006/main" xmlns:r="http://schemas.openxmlformats.org/officeDocument/2006/relationships" xmlns:p="http://schemas.openxmlformats.org/presentationml/2006/main">
+  <p:cSld>
+    <p:spTree>
+      <p:nvGrpSpPr>
+        <p:cNvPr id="1" name="">
+          <a:extLst>
+            <a:ext uri="{FF2B5EF4-FFF2-40B4-BE49-F238E27FC236}">
+              <a16:creationId xmlns:a16="http://schemas.microsoft.com/office/drawing/2014/main" id="{D7DAD6B6-304F-46D6-92D3-CC6E2CC15919}"/>
+            </a:ext>
+          </a:extLst>
+        </p:cNvPr>
+        <p:cNvGrpSpPr/>
+        <p:nvPr/>
+      </p:nvGrpSpPr>
+      <p:grpSpPr>
+        <a:xfrm>
+          <a:off x="0" y="0"/>
+          <a:ext cx="0" cy="0"/>
+          <a:chOff x="0" y="0"/>
+          <a:chExt cx="0" cy="0"/>
+        </a:xfrm>
+      </p:grpSpPr>
+      <p:sp>
+        <p:nvSpPr>
+          <p:cNvPr id="4" name="Rechteck 3">
+            <a:extLst>
+              <a:ext uri="{FF2B5EF4-FFF2-40B4-BE49-F238E27FC236}">
+                <a16:creationId xmlns:a16="http://schemas.microsoft.com/office/drawing/2014/main" id="{1887AE9F-E1BE-43E6-5756-22BD9528159D}"/>
+              </a:ext>
+            </a:extLst>
+          </p:cNvPr>
+          <p:cNvSpPr/>
+          <p:nvPr/>
+        </p:nvSpPr>
+        <p:spPr>
+          <a:xfrm>
+            <a:off x="1392011" y="2106386"/>
+            <a:ext cx="145143" cy="5667828"/>
+          </a:xfrm>
+          <a:prstGeom prst="rect">
+            <a:avLst/>
+          </a:prstGeom>
+          <a:solidFill>
+            <a:srgbClr val="00B0F0"/>
+          </a:solidFill>
+          <a:ln>
+            <a:solidFill>
+              <a:srgbClr val="00B0F0"/>
+            </a:solidFill>
+          </a:ln>
+        </p:spPr>
+        <p:style>
+          <a:lnRef idx="2">
+            <a:schemeClr val="accent1">
+              <a:shade val="15000"/>
+            </a:schemeClr>
+          </a:lnRef>
+          <a:fillRef idx="1">
+            <a:schemeClr val="accent1"/>
+          </a:fillRef>
+          <a:effectRef idx="0">
+            <a:schemeClr val="accent1"/>
+          </a:effectRef>
+          <a:fontRef idx="minor">
+            <a:schemeClr val="lt1"/>
+          </a:fontRef>
+        </p:style>
+        <p:txBody>
+          <a:bodyPr rtlCol="0" anchor="ctr"/>
+          <a:lstStyle/>
+          <a:p>
+            <a:pPr algn="ctr"/>
+            <a:endParaRPr lang="de-DE"/>
+          </a:p>
+        </p:txBody>
+      </p:sp>
+      <p:sp>
+        <p:nvSpPr>
+          <p:cNvPr id="8" name="Rechteck 7">
+            <a:extLst>
+              <a:ext uri="{FF2B5EF4-FFF2-40B4-BE49-F238E27FC236}">
+                <a16:creationId xmlns:a16="http://schemas.microsoft.com/office/drawing/2014/main" id="{C4E6C7FD-3E99-8D3E-1DD6-F10C5A817B76}"/>
+              </a:ext>
+            </a:extLst>
+          </p:cNvPr>
+          <p:cNvSpPr/>
+          <p:nvPr/>
+        </p:nvSpPr>
+        <p:spPr>
+          <a:xfrm>
+            <a:off x="3968297" y="2106386"/>
+            <a:ext cx="145143" cy="5667828"/>
+          </a:xfrm>
+          <a:prstGeom prst="rect">
+            <a:avLst/>
+          </a:prstGeom>
+          <a:solidFill>
+            <a:srgbClr val="00B0F0"/>
+          </a:solidFill>
+          <a:ln>
+            <a:solidFill>
+              <a:srgbClr val="00B0F0"/>
+            </a:solidFill>
+          </a:ln>
+        </p:spPr>
+        <p:style>
+          <a:lnRef idx="2">
+            <a:schemeClr val="accent1">
+              <a:shade val="15000"/>
+            </a:schemeClr>
+          </a:lnRef>
+          <a:fillRef idx="1">
+            <a:schemeClr val="accent1"/>
+          </a:fillRef>
+          <a:effectRef idx="0">
+            <a:schemeClr val="accent1"/>
+          </a:effectRef>
+          <a:fontRef idx="minor">
+            <a:schemeClr val="lt1"/>
+          </a:fontRef>
+        </p:style>
+        <p:txBody>
+          <a:bodyPr rtlCol="0" anchor="ctr"/>
+          <a:lstStyle/>
+          <a:p>
+            <a:pPr algn="ctr"/>
+            <a:endParaRPr lang="de-DE"/>
+          </a:p>
+        </p:txBody>
+      </p:sp>
+      <p:sp>
+        <p:nvSpPr>
+          <p:cNvPr id="11" name="Textfeld 10">
+            <a:extLst>
+              <a:ext uri="{FF2B5EF4-FFF2-40B4-BE49-F238E27FC236}">
+                <a16:creationId xmlns:a16="http://schemas.microsoft.com/office/drawing/2014/main" id="{2BFD53A3-EDF6-2FB2-BC2C-A59E442BD19C}"/>
+              </a:ext>
+            </a:extLst>
+          </p:cNvPr>
+          <p:cNvSpPr txBox="1"/>
+          <p:nvPr/>
+        </p:nvSpPr>
+        <p:spPr>
+          <a:xfrm>
+            <a:off x="1841954" y="1155700"/>
+            <a:ext cx="1821543" cy="1477328"/>
+          </a:xfrm>
+          <a:prstGeom prst="rect">
+            <a:avLst/>
+          </a:prstGeom>
+          <a:noFill/>
+        </p:spPr>
+        <p:txBody>
+          <a:bodyPr wrap="square" rtlCol="0">
+            <a:spAutoFit/>
+          </a:bodyPr>
+          <a:lstStyle/>
+          <a:p>
+            <a:pPr algn="ctr"/>
+            <a:r>
+              <a:rPr lang="de-DE" dirty="0"/>
+              <a:t>Normal</a:t>
+            </a:r>
+          </a:p>
+          <a:p>
+            <a:pPr algn="ctr"/>
+            <a:endParaRPr lang="de-DE" dirty="0"/>
+          </a:p>
+          <a:p>
+            <a:pPr algn="ctr"/>
+            <a:endParaRPr lang="de-DE" dirty="0"/>
+          </a:p>
+          <a:p>
+            <a:pPr algn="ctr"/>
+            <a:endParaRPr lang="de-DE" dirty="0"/>
+          </a:p>
+          <a:p>
+            <a:pPr algn="ctr"/>
+            <a:endParaRPr lang="de-DE" dirty="0"/>
+          </a:p>
+        </p:txBody>
+      </p:sp>
+      <p:sp>
+        <p:nvSpPr>
+          <p:cNvPr id="13" name="Rechteck 12">
+            <a:extLst>
+              <a:ext uri="{FF2B5EF4-FFF2-40B4-BE49-F238E27FC236}">
+                <a16:creationId xmlns:a16="http://schemas.microsoft.com/office/drawing/2014/main" id="{E1C65AF2-72B8-46E0-85A4-2D6AD5340F54}"/>
+              </a:ext>
+            </a:extLst>
+          </p:cNvPr>
+          <p:cNvSpPr/>
+          <p:nvPr/>
+        </p:nvSpPr>
+        <p:spPr>
+          <a:xfrm>
+            <a:off x="7829096" y="2141890"/>
+            <a:ext cx="145143" cy="5667828"/>
+          </a:xfrm>
+          <a:prstGeom prst="rect">
+            <a:avLst/>
+          </a:prstGeom>
+          <a:solidFill>
+            <a:srgbClr val="00B0F0"/>
+          </a:solidFill>
+          <a:ln>
+            <a:solidFill>
+              <a:srgbClr val="00B0F0"/>
+            </a:solidFill>
+          </a:ln>
+        </p:spPr>
+        <p:style>
+          <a:lnRef idx="2">
+            <a:schemeClr val="accent1">
+              <a:shade val="15000"/>
+            </a:schemeClr>
+          </a:lnRef>
+          <a:fillRef idx="1">
+            <a:schemeClr val="accent1"/>
+          </a:fillRef>
+          <a:effectRef idx="0">
+            <a:schemeClr val="accent1"/>
+          </a:effectRef>
+          <a:fontRef idx="minor">
+            <a:schemeClr val="lt1"/>
+          </a:fontRef>
+        </p:style>
+        <p:txBody>
+          <a:bodyPr rtlCol="0" anchor="ctr"/>
+          <a:lstStyle/>
+          <a:p>
+            <a:pPr algn="ctr"/>
+            <a:endParaRPr lang="de-DE"/>
+          </a:p>
+        </p:txBody>
+      </p:sp>
+      <p:sp>
+        <p:nvSpPr>
+          <p:cNvPr id="15" name="Rechteck 14">
+            <a:extLst>
+              <a:ext uri="{FF2B5EF4-FFF2-40B4-BE49-F238E27FC236}">
+                <a16:creationId xmlns:a16="http://schemas.microsoft.com/office/drawing/2014/main" id="{0108068F-FB1F-3170-EB3D-FFCDC230ED37}"/>
+              </a:ext>
+            </a:extLst>
+          </p:cNvPr>
+          <p:cNvSpPr/>
+          <p:nvPr/>
+        </p:nvSpPr>
+        <p:spPr>
+          <a:xfrm>
+            <a:off x="10405382" y="2141890"/>
+            <a:ext cx="145143" cy="5667828"/>
+          </a:xfrm>
+          <a:prstGeom prst="rect">
+            <a:avLst/>
+          </a:prstGeom>
+          <a:solidFill>
+            <a:srgbClr val="00B0F0"/>
+          </a:solidFill>
+          <a:ln>
+            <a:solidFill>
+              <a:srgbClr val="00B0F0"/>
+            </a:solidFill>
+          </a:ln>
+        </p:spPr>
+        <p:style>
+          <a:lnRef idx="2">
+            <a:schemeClr val="accent1">
+              <a:shade val="15000"/>
+            </a:schemeClr>
+          </a:lnRef>
+          <a:fillRef idx="1">
+            <a:schemeClr val="accent1"/>
+          </a:fillRef>
+          <a:effectRef idx="0">
+            <a:schemeClr val="accent1"/>
+          </a:effectRef>
+          <a:fontRef idx="minor">
+            <a:schemeClr val="lt1"/>
+          </a:fontRef>
+        </p:style>
+        <p:txBody>
+          <a:bodyPr rtlCol="0" anchor="ctr"/>
+          <a:lstStyle/>
+          <a:p>
+            <a:pPr algn="ctr"/>
+            <a:endParaRPr lang="de-DE"/>
+          </a:p>
+        </p:txBody>
+      </p:sp>
+      <p:sp>
+        <p:nvSpPr>
+          <p:cNvPr id="17" name="Textfeld 16">
+            <a:extLst>
+              <a:ext uri="{FF2B5EF4-FFF2-40B4-BE49-F238E27FC236}">
+                <a16:creationId xmlns:a16="http://schemas.microsoft.com/office/drawing/2014/main" id="{263A2E50-0235-985A-70A5-DD9F7F11F42A}"/>
+              </a:ext>
+            </a:extLst>
+          </p:cNvPr>
+          <p:cNvSpPr txBox="1"/>
+          <p:nvPr/>
+        </p:nvSpPr>
+        <p:spPr>
+          <a:xfrm>
+            <a:off x="8133896" y="1155700"/>
+            <a:ext cx="1821543" cy="1477328"/>
+          </a:xfrm>
+          <a:prstGeom prst="rect">
+            <a:avLst/>
+          </a:prstGeom>
+          <a:noFill/>
+        </p:spPr>
+        <p:txBody>
+          <a:bodyPr wrap="square" rtlCol="0">
+            <a:spAutoFit/>
+          </a:bodyPr>
+          <a:lstStyle/>
+          <a:p>
+            <a:pPr algn="ctr"/>
+            <a:r>
+              <a:rPr lang="de-DE" dirty="0" err="1"/>
+              <a:t>Failure</a:t>
+            </a:r>
+            <a:endParaRPr lang="de-DE" dirty="0"/>
+          </a:p>
+          <a:p>
+            <a:pPr algn="ctr"/>
+            <a:endParaRPr lang="de-DE" dirty="0"/>
+          </a:p>
+          <a:p>
+            <a:pPr algn="ctr"/>
+            <a:endParaRPr lang="de-DE" dirty="0"/>
+          </a:p>
+          <a:p>
+            <a:pPr algn="ctr"/>
+            <a:endParaRPr lang="de-DE" dirty="0"/>
+          </a:p>
+          <a:p>
+            <a:pPr algn="ctr"/>
+            <a:endParaRPr lang="de-DE" dirty="0"/>
+          </a:p>
+        </p:txBody>
+      </p:sp>
+      <p:sp>
+        <p:nvSpPr>
+          <p:cNvPr id="18" name="Textfeld 17">
+            <a:extLst>
+              <a:ext uri="{FF2B5EF4-FFF2-40B4-BE49-F238E27FC236}">
+                <a16:creationId xmlns:a16="http://schemas.microsoft.com/office/drawing/2014/main" id="{B4ED4CA2-5EDC-24A8-D394-FA43412033F7}"/>
+              </a:ext>
+            </a:extLst>
+          </p:cNvPr>
+          <p:cNvSpPr txBox="1"/>
+          <p:nvPr/>
+        </p:nvSpPr>
+        <p:spPr>
+          <a:xfrm>
+            <a:off x="680810" y="1634671"/>
+            <a:ext cx="1567543" cy="369332"/>
+          </a:xfrm>
+          <a:prstGeom prst="rect">
+            <a:avLst/>
+          </a:prstGeom>
+          <a:noFill/>
+        </p:spPr>
+        <p:txBody>
+          <a:bodyPr wrap="square" rtlCol="0">
+            <a:spAutoFit/>
+          </a:bodyPr>
+          <a:lstStyle/>
+          <a:p>
+            <a:pPr algn="ctr"/>
+            <a:r>
+              <a:rPr lang="de-DE" dirty="0"/>
+              <a:t>A</a:t>
+            </a:r>
+          </a:p>
+        </p:txBody>
+      </p:sp>
+      <p:sp>
+        <p:nvSpPr>
+          <p:cNvPr id="20" name="Textfeld 19">
+            <a:extLst>
+              <a:ext uri="{FF2B5EF4-FFF2-40B4-BE49-F238E27FC236}">
+                <a16:creationId xmlns:a16="http://schemas.microsoft.com/office/drawing/2014/main" id="{6F73700A-8BA2-8BD5-CF72-0A5750405149}"/>
+              </a:ext>
+            </a:extLst>
+          </p:cNvPr>
+          <p:cNvSpPr txBox="1"/>
+          <p:nvPr/>
+        </p:nvSpPr>
+        <p:spPr>
+          <a:xfrm>
+            <a:off x="9694181" y="1634671"/>
+            <a:ext cx="1567543" cy="369332"/>
+          </a:xfrm>
+          <a:prstGeom prst="rect">
+            <a:avLst/>
+          </a:prstGeom>
+          <a:noFill/>
+        </p:spPr>
+        <p:txBody>
+          <a:bodyPr wrap="square" rtlCol="0">
+            <a:spAutoFit/>
+          </a:bodyPr>
+          <a:lstStyle/>
+          <a:p>
+            <a:pPr algn="ctr"/>
+            <a:r>
+              <a:rPr lang="de-DE" dirty="0"/>
+              <a:t>B</a:t>
+            </a:r>
+          </a:p>
+        </p:txBody>
+      </p:sp>
+      <p:sp>
+        <p:nvSpPr>
+          <p:cNvPr id="22" name="Textfeld 21">
+            <a:extLst>
+              <a:ext uri="{FF2B5EF4-FFF2-40B4-BE49-F238E27FC236}">
+                <a16:creationId xmlns:a16="http://schemas.microsoft.com/office/drawing/2014/main" id="{17C0502F-5F77-8F38-BA8F-6DC8624B24E0}"/>
+              </a:ext>
+            </a:extLst>
+          </p:cNvPr>
+          <p:cNvSpPr txBox="1"/>
+          <p:nvPr/>
+        </p:nvSpPr>
+        <p:spPr>
+          <a:xfrm>
+            <a:off x="3130096" y="1634671"/>
+            <a:ext cx="1821543" cy="369332"/>
+          </a:xfrm>
+          <a:prstGeom prst="rect">
+            <a:avLst/>
+          </a:prstGeom>
+          <a:noFill/>
+        </p:spPr>
+        <p:txBody>
+          <a:bodyPr wrap="square" rtlCol="0">
+            <a:spAutoFit/>
+          </a:bodyPr>
+          <a:lstStyle/>
+          <a:p>
+            <a:pPr algn="ctr"/>
+            <a:r>
+              <a:rPr lang="de-DE" dirty="0"/>
+              <a:t>B</a:t>
+            </a:r>
+          </a:p>
+        </p:txBody>
+      </p:sp>
+      <p:sp>
+        <p:nvSpPr>
+          <p:cNvPr id="24" name="Textfeld 23">
+            <a:extLst>
+              <a:ext uri="{FF2B5EF4-FFF2-40B4-BE49-F238E27FC236}">
+                <a16:creationId xmlns:a16="http://schemas.microsoft.com/office/drawing/2014/main" id="{A0422458-6A57-17FA-4456-2DD0393BFD9D}"/>
+              </a:ext>
+            </a:extLst>
+          </p:cNvPr>
+          <p:cNvSpPr txBox="1"/>
+          <p:nvPr/>
+        </p:nvSpPr>
+        <p:spPr>
+          <a:xfrm>
+            <a:off x="6990895" y="1709698"/>
+            <a:ext cx="1821543" cy="369332"/>
+          </a:xfrm>
+          <a:prstGeom prst="rect">
+            <a:avLst/>
+          </a:prstGeom>
+          <a:noFill/>
+        </p:spPr>
+        <p:txBody>
+          <a:bodyPr wrap="square" rtlCol="0">
+            <a:spAutoFit/>
+          </a:bodyPr>
+          <a:lstStyle/>
+          <a:p>
+            <a:pPr algn="ctr"/>
+            <a:r>
+              <a:rPr lang="de-DE" dirty="0"/>
+              <a:t>A</a:t>
+            </a:r>
+          </a:p>
+        </p:txBody>
+      </p:sp>
+      <p:sp>
+        <p:nvSpPr>
+          <p:cNvPr id="123" name="Textfeld 122">
+            <a:extLst>
+              <a:ext uri="{FF2B5EF4-FFF2-40B4-BE49-F238E27FC236}">
+                <a16:creationId xmlns:a16="http://schemas.microsoft.com/office/drawing/2014/main" id="{B59A4924-0594-421D-83A8-9D032E150DD8}"/>
+              </a:ext>
+            </a:extLst>
+          </p:cNvPr>
+          <p:cNvSpPr txBox="1"/>
+          <p:nvPr/>
+        </p:nvSpPr>
+        <p:spPr>
+          <a:xfrm>
+            <a:off x="4572468" y="177655"/>
+            <a:ext cx="3047064" cy="369332"/>
+          </a:xfrm>
+          <a:prstGeom prst="rect">
+            <a:avLst/>
+          </a:prstGeom>
+          <a:noFill/>
+        </p:spPr>
+        <p:txBody>
+          <a:bodyPr wrap="square" rtlCol="0">
+            <a:spAutoFit/>
+          </a:bodyPr>
+          <a:lstStyle/>
+          <a:p>
+            <a:r>
+              <a:rPr lang="de-DE" dirty="0"/>
+              <a:t>TPC </a:t>
+            </a:r>
+            <a:r>
+              <a:rPr lang="de-DE" dirty="0" err="1"/>
+              <a:t>for</a:t>
+            </a:r>
+            <a:r>
+              <a:rPr lang="de-DE" dirty="0"/>
+              <a:t> BLE</a:t>
+            </a:r>
+          </a:p>
+        </p:txBody>
+      </p:sp>
+      <p:cxnSp>
+        <p:nvCxnSpPr>
+          <p:cNvPr id="3" name="Gerade Verbindung mit Pfeil 2">
+            <a:extLst>
+              <a:ext uri="{FF2B5EF4-FFF2-40B4-BE49-F238E27FC236}">
+                <a16:creationId xmlns:a16="http://schemas.microsoft.com/office/drawing/2014/main" id="{83E3DCC4-7CC3-2F28-713F-7ED9F6C18608}"/>
+              </a:ext>
+            </a:extLst>
+          </p:cNvPr>
+          <p:cNvCxnSpPr>
+            <a:cxnSpLocks/>
+          </p:cNvCxnSpPr>
+          <p:nvPr/>
+        </p:nvCxnSpPr>
+        <p:spPr>
+          <a:xfrm>
+            <a:off x="1537153" y="2796848"/>
+            <a:ext cx="2431143" cy="150692"/>
+          </a:xfrm>
+          <a:prstGeom prst="straightConnector1">
+            <a:avLst/>
+          </a:prstGeom>
+          <a:ln>
+            <a:solidFill>
+              <a:schemeClr val="tx1"/>
+            </a:solidFill>
+            <a:tailEnd type="triangle"/>
+          </a:ln>
+        </p:spPr>
+        <p:style>
+          <a:lnRef idx="2">
+            <a:schemeClr val="accent1"/>
+          </a:lnRef>
+          <a:fillRef idx="0">
+            <a:schemeClr val="accent1"/>
+          </a:fillRef>
+          <a:effectRef idx="1">
+            <a:schemeClr val="accent1"/>
+          </a:effectRef>
+          <a:fontRef idx="minor">
+            <a:schemeClr val="tx1"/>
+          </a:fontRef>
+        </p:style>
+      </p:cxnSp>
+      <p:sp>
+        <p:nvSpPr>
+          <p:cNvPr id="6" name="Textfeld 5">
+            <a:extLst>
+              <a:ext uri="{FF2B5EF4-FFF2-40B4-BE49-F238E27FC236}">
+                <a16:creationId xmlns:a16="http://schemas.microsoft.com/office/drawing/2014/main" id="{547AF22F-2481-38BF-A45B-D94C36382ED4}"/>
+              </a:ext>
+            </a:extLst>
+          </p:cNvPr>
+          <p:cNvSpPr txBox="1"/>
+          <p:nvPr/>
+        </p:nvSpPr>
+        <p:spPr>
+          <a:xfrm>
+            <a:off x="722103" y="2083619"/>
+            <a:ext cx="669908" cy="246221"/>
+          </a:xfrm>
+          <a:prstGeom prst="rect">
+            <a:avLst/>
+          </a:prstGeom>
+          <a:noFill/>
+        </p:spPr>
+        <p:txBody>
+          <a:bodyPr wrap="square" rtlCol="0">
+            <a:spAutoFit/>
+          </a:bodyPr>
+          <a:lstStyle/>
+          <a:p>
+            <a:pPr algn="r"/>
+            <a:r>
+              <a:rPr lang="de-DE" sz="1000" dirty="0"/>
+              <a:t>Idle</a:t>
+            </a:r>
+          </a:p>
+        </p:txBody>
+      </p:sp>
+      <p:sp>
+        <p:nvSpPr>
+          <p:cNvPr id="9" name="Textfeld 8">
+            <a:extLst>
+              <a:ext uri="{FF2B5EF4-FFF2-40B4-BE49-F238E27FC236}">
+                <a16:creationId xmlns:a16="http://schemas.microsoft.com/office/drawing/2014/main" id="{A7A3DE94-E378-3DC9-9164-52D2D0706D8F}"/>
+              </a:ext>
+            </a:extLst>
+          </p:cNvPr>
+          <p:cNvSpPr txBox="1"/>
+          <p:nvPr/>
+        </p:nvSpPr>
+        <p:spPr>
+          <a:xfrm>
+            <a:off x="4113440" y="2106386"/>
+            <a:ext cx="669908" cy="246221"/>
+          </a:xfrm>
+          <a:prstGeom prst="rect">
+            <a:avLst/>
+          </a:prstGeom>
+          <a:noFill/>
+        </p:spPr>
+        <p:txBody>
+          <a:bodyPr wrap="square" rtlCol="0">
+            <a:spAutoFit/>
+          </a:bodyPr>
+          <a:lstStyle/>
+          <a:p>
+            <a:r>
+              <a:rPr lang="de-DE" sz="1000" dirty="0"/>
+              <a:t>Idle</a:t>
+            </a:r>
+          </a:p>
+        </p:txBody>
+      </p:sp>
+      <p:cxnSp>
+        <p:nvCxnSpPr>
+          <p:cNvPr id="12" name="Gerade Verbindung mit Pfeil 11">
+            <a:extLst>
+              <a:ext uri="{FF2B5EF4-FFF2-40B4-BE49-F238E27FC236}">
+                <a16:creationId xmlns:a16="http://schemas.microsoft.com/office/drawing/2014/main" id="{B55FCF83-4BF3-1D39-E02F-A62E5432E59A}"/>
+              </a:ext>
+            </a:extLst>
+          </p:cNvPr>
+          <p:cNvCxnSpPr/>
+          <p:nvPr/>
+        </p:nvCxnSpPr>
+        <p:spPr>
+          <a:xfrm>
+            <a:off x="151585" y="2352607"/>
+            <a:ext cx="1240426" cy="43414"/>
+          </a:xfrm>
+          <a:prstGeom prst="straightConnector1">
+            <a:avLst/>
+          </a:prstGeom>
+          <a:ln>
+            <a:solidFill>
+              <a:schemeClr val="tx1"/>
+            </a:solidFill>
+            <a:tailEnd type="triangle"/>
+          </a:ln>
+        </p:spPr>
+        <p:style>
+          <a:lnRef idx="2">
+            <a:schemeClr val="accent1"/>
+          </a:lnRef>
+          <a:fillRef idx="0">
+            <a:schemeClr val="accent1"/>
+          </a:fillRef>
+          <a:effectRef idx="1">
+            <a:schemeClr val="accent1"/>
+          </a:effectRef>
+          <a:fontRef idx="minor">
+            <a:schemeClr val="tx1"/>
+          </a:fontRef>
+        </p:style>
+      </p:cxnSp>
+      <p:sp>
+        <p:nvSpPr>
+          <p:cNvPr id="16" name="Textfeld 15">
+            <a:extLst>
+              <a:ext uri="{FF2B5EF4-FFF2-40B4-BE49-F238E27FC236}">
+                <a16:creationId xmlns:a16="http://schemas.microsoft.com/office/drawing/2014/main" id="{D7E40FBE-15B2-0B7E-D303-E40F5F2A829A}"/>
+              </a:ext>
+            </a:extLst>
+          </p:cNvPr>
+          <p:cNvSpPr txBox="1"/>
+          <p:nvPr/>
+        </p:nvSpPr>
+        <p:spPr>
+          <a:xfrm>
+            <a:off x="722103" y="2498404"/>
+            <a:ext cx="669908" cy="246221"/>
+          </a:xfrm>
+          <a:prstGeom prst="rect">
+            <a:avLst/>
+          </a:prstGeom>
+          <a:noFill/>
+        </p:spPr>
+        <p:txBody>
+          <a:bodyPr wrap="square" rtlCol="0">
+            <a:spAutoFit/>
+          </a:bodyPr>
+          <a:lstStyle/>
+          <a:p>
+            <a:pPr algn="r"/>
+            <a:r>
+              <a:rPr lang="de-DE" sz="1000" dirty="0"/>
+              <a:t>Send</a:t>
+            </a:r>
+          </a:p>
+        </p:txBody>
+      </p:sp>
+      <p:sp>
+        <p:nvSpPr>
+          <p:cNvPr id="21" name="Textfeld 20">
+            <a:extLst>
+              <a:ext uri="{FF2B5EF4-FFF2-40B4-BE49-F238E27FC236}">
+                <a16:creationId xmlns:a16="http://schemas.microsoft.com/office/drawing/2014/main" id="{7004B971-EFBE-6F9B-D2F0-D017980802ED}"/>
+              </a:ext>
+            </a:extLst>
+          </p:cNvPr>
+          <p:cNvSpPr txBox="1"/>
+          <p:nvPr/>
+        </p:nvSpPr>
+        <p:spPr>
+          <a:xfrm>
+            <a:off x="4113440" y="3011569"/>
+            <a:ext cx="669908" cy="246221"/>
+          </a:xfrm>
+          <a:prstGeom prst="rect">
+            <a:avLst/>
+          </a:prstGeom>
+          <a:noFill/>
+        </p:spPr>
+        <p:txBody>
+          <a:bodyPr wrap="square" rtlCol="0">
+            <a:spAutoFit/>
+          </a:bodyPr>
+          <a:lstStyle/>
+          <a:p>
+            <a:r>
+              <a:rPr lang="de-DE" sz="1000" dirty="0" err="1"/>
+              <a:t>Receive</a:t>
+            </a:r>
+            <a:endParaRPr lang="de-DE" sz="1000" dirty="0"/>
+          </a:p>
+        </p:txBody>
+      </p:sp>
+      <p:cxnSp>
+        <p:nvCxnSpPr>
+          <p:cNvPr id="25" name="Gerade Verbindung mit Pfeil 24">
+            <a:extLst>
+              <a:ext uri="{FF2B5EF4-FFF2-40B4-BE49-F238E27FC236}">
+                <a16:creationId xmlns:a16="http://schemas.microsoft.com/office/drawing/2014/main" id="{2AA9C3A7-12AD-E06E-52A2-D5B923A67FC5}"/>
+              </a:ext>
+            </a:extLst>
+          </p:cNvPr>
+          <p:cNvCxnSpPr/>
+          <p:nvPr/>
+        </p:nvCxnSpPr>
+        <p:spPr>
+          <a:xfrm flipH="1">
+            <a:off x="1537153" y="3257790"/>
+            <a:ext cx="2431143" cy="130869"/>
+          </a:xfrm>
+          <a:prstGeom prst="straightConnector1">
+            <a:avLst/>
+          </a:prstGeom>
+          <a:ln>
+            <a:solidFill>
+              <a:schemeClr val="tx1"/>
+            </a:solidFill>
+            <a:tailEnd type="triangle"/>
+          </a:ln>
+        </p:spPr>
+        <p:style>
+          <a:lnRef idx="2">
+            <a:schemeClr val="accent1"/>
+          </a:lnRef>
+          <a:fillRef idx="0">
+            <a:schemeClr val="accent1"/>
+          </a:fillRef>
+          <a:effectRef idx="1">
+            <a:schemeClr val="accent1"/>
+          </a:effectRef>
+          <a:fontRef idx="minor">
+            <a:schemeClr val="tx1"/>
+          </a:fontRef>
+        </p:style>
+      </p:cxnSp>
+      <p:cxnSp>
+        <p:nvCxnSpPr>
+          <p:cNvPr id="26" name="Gerade Verbindung mit Pfeil 25">
+            <a:extLst>
+              <a:ext uri="{FF2B5EF4-FFF2-40B4-BE49-F238E27FC236}">
+                <a16:creationId xmlns:a16="http://schemas.microsoft.com/office/drawing/2014/main" id="{2168062B-5CA2-EB10-3CD5-EF4796C729A2}"/>
+              </a:ext>
+            </a:extLst>
+          </p:cNvPr>
+          <p:cNvCxnSpPr>
+            <a:cxnSpLocks/>
+          </p:cNvCxnSpPr>
+          <p:nvPr/>
+        </p:nvCxnSpPr>
+        <p:spPr>
+          <a:xfrm>
+            <a:off x="1524454" y="3572215"/>
+            <a:ext cx="2431143" cy="150692"/>
+          </a:xfrm>
+          <a:prstGeom prst="straightConnector1">
+            <a:avLst/>
+          </a:prstGeom>
+          <a:ln>
+            <a:solidFill>
+              <a:schemeClr val="tx1"/>
+            </a:solidFill>
+            <a:tailEnd type="triangle"/>
+          </a:ln>
+        </p:spPr>
+        <p:style>
+          <a:lnRef idx="2">
+            <a:schemeClr val="accent1"/>
+          </a:lnRef>
+          <a:fillRef idx="0">
+            <a:schemeClr val="accent1"/>
+          </a:fillRef>
+          <a:effectRef idx="1">
+            <a:schemeClr val="accent1"/>
+          </a:effectRef>
+          <a:fontRef idx="minor">
+            <a:schemeClr val="tx1"/>
+          </a:fontRef>
+        </p:style>
+      </p:cxnSp>
+      <p:cxnSp>
+        <p:nvCxnSpPr>
+          <p:cNvPr id="27" name="Gerade Verbindung mit Pfeil 26">
+            <a:extLst>
+              <a:ext uri="{FF2B5EF4-FFF2-40B4-BE49-F238E27FC236}">
+                <a16:creationId xmlns:a16="http://schemas.microsoft.com/office/drawing/2014/main" id="{B444F402-1159-48E1-38DC-A4C6E55C6E9E}"/>
+              </a:ext>
+            </a:extLst>
+          </p:cNvPr>
+          <p:cNvCxnSpPr/>
+          <p:nvPr/>
+        </p:nvCxnSpPr>
+        <p:spPr>
+          <a:xfrm flipH="1">
+            <a:off x="1524454" y="4033157"/>
+            <a:ext cx="2431143" cy="130869"/>
+          </a:xfrm>
+          <a:prstGeom prst="straightConnector1">
+            <a:avLst/>
+          </a:prstGeom>
+          <a:ln>
+            <a:solidFill>
+              <a:schemeClr val="tx1"/>
+            </a:solidFill>
+            <a:tailEnd type="triangle"/>
+          </a:ln>
+        </p:spPr>
+        <p:style>
+          <a:lnRef idx="2">
+            <a:schemeClr val="accent1"/>
+          </a:lnRef>
+          <a:fillRef idx="0">
+            <a:schemeClr val="accent1"/>
+          </a:fillRef>
+          <a:effectRef idx="1">
+            <a:schemeClr val="accent1"/>
+          </a:effectRef>
+          <a:fontRef idx="minor">
+            <a:schemeClr val="tx1"/>
+          </a:fontRef>
+        </p:style>
+      </p:cxnSp>
+      <p:cxnSp>
+        <p:nvCxnSpPr>
+          <p:cNvPr id="28" name="Gerade Verbindung mit Pfeil 27">
+            <a:extLst>
+              <a:ext uri="{FF2B5EF4-FFF2-40B4-BE49-F238E27FC236}">
+                <a16:creationId xmlns:a16="http://schemas.microsoft.com/office/drawing/2014/main" id="{DDC77FDE-6D6B-0883-1C6C-3EC50D37992D}"/>
+              </a:ext>
+            </a:extLst>
+          </p:cNvPr>
+          <p:cNvCxnSpPr>
+            <a:cxnSpLocks/>
+          </p:cNvCxnSpPr>
+          <p:nvPr/>
+        </p:nvCxnSpPr>
+        <p:spPr>
+          <a:xfrm>
+            <a:off x="1537154" y="4451049"/>
+            <a:ext cx="2431143" cy="150692"/>
+          </a:xfrm>
+          <a:prstGeom prst="straightConnector1">
+            <a:avLst/>
+          </a:prstGeom>
+          <a:ln>
+            <a:solidFill>
+              <a:schemeClr val="tx1"/>
+            </a:solidFill>
+            <a:tailEnd type="triangle"/>
+          </a:ln>
+        </p:spPr>
+        <p:style>
+          <a:lnRef idx="2">
+            <a:schemeClr val="accent1"/>
+          </a:lnRef>
+          <a:fillRef idx="0">
+            <a:schemeClr val="accent1"/>
+          </a:fillRef>
+          <a:effectRef idx="1">
+            <a:schemeClr val="accent1"/>
+          </a:effectRef>
+          <a:fontRef idx="minor">
+            <a:schemeClr val="tx1"/>
+          </a:fontRef>
+        </p:style>
+      </p:cxnSp>
+      <p:cxnSp>
+        <p:nvCxnSpPr>
+          <p:cNvPr id="29" name="Gerade Verbindung mit Pfeil 28">
+            <a:extLst>
+              <a:ext uri="{FF2B5EF4-FFF2-40B4-BE49-F238E27FC236}">
+                <a16:creationId xmlns:a16="http://schemas.microsoft.com/office/drawing/2014/main" id="{67119DB8-CFE3-97CB-D1D0-2A211691CE70}"/>
+              </a:ext>
+            </a:extLst>
+          </p:cNvPr>
+          <p:cNvCxnSpPr/>
+          <p:nvPr/>
+        </p:nvCxnSpPr>
+        <p:spPr>
+          <a:xfrm flipH="1">
+            <a:off x="1537154" y="4911991"/>
+            <a:ext cx="2431143" cy="130869"/>
+          </a:xfrm>
+          <a:prstGeom prst="straightConnector1">
+            <a:avLst/>
+          </a:prstGeom>
+          <a:ln>
+            <a:solidFill>
+              <a:schemeClr val="tx1"/>
+            </a:solidFill>
+            <a:tailEnd type="triangle"/>
+          </a:ln>
+        </p:spPr>
+        <p:style>
+          <a:lnRef idx="2">
+            <a:schemeClr val="accent1"/>
+          </a:lnRef>
+          <a:fillRef idx="0">
+            <a:schemeClr val="accent1"/>
+          </a:fillRef>
+          <a:effectRef idx="1">
+            <a:schemeClr val="accent1"/>
+          </a:effectRef>
+          <a:fontRef idx="minor">
+            <a:schemeClr val="tx1"/>
+          </a:fontRef>
+        </p:style>
+      </p:cxnSp>
+      <p:sp>
+        <p:nvSpPr>
+          <p:cNvPr id="33" name="Textfeld 32">
+            <a:extLst>
+              <a:ext uri="{FF2B5EF4-FFF2-40B4-BE49-F238E27FC236}">
+                <a16:creationId xmlns:a16="http://schemas.microsoft.com/office/drawing/2014/main" id="{C2F42CBE-E50F-AE70-4043-BE9B69F71F62}"/>
+              </a:ext>
+            </a:extLst>
+          </p:cNvPr>
+          <p:cNvSpPr txBox="1"/>
+          <p:nvPr/>
+        </p:nvSpPr>
+        <p:spPr>
+          <a:xfrm>
+            <a:off x="2416284" y="2628678"/>
+            <a:ext cx="669908" cy="246221"/>
+          </a:xfrm>
+          <a:prstGeom prst="rect">
+            <a:avLst/>
+          </a:prstGeom>
+          <a:noFill/>
+        </p:spPr>
+        <p:txBody>
+          <a:bodyPr wrap="square" rtlCol="0">
+            <a:spAutoFit/>
+          </a:bodyPr>
+          <a:lstStyle/>
+          <a:p>
+            <a:pPr algn="ctr"/>
+            <a:r>
+              <a:rPr lang="de-DE" sz="1000" dirty="0"/>
+              <a:t>Data 1</a:t>
+            </a:r>
+          </a:p>
+        </p:txBody>
+      </p:sp>
+      <p:sp>
+        <p:nvSpPr>
+          <p:cNvPr id="35" name="Textfeld 34">
+            <a:extLst>
+              <a:ext uri="{FF2B5EF4-FFF2-40B4-BE49-F238E27FC236}">
+                <a16:creationId xmlns:a16="http://schemas.microsoft.com/office/drawing/2014/main" id="{A28EF5DE-3F92-3DFD-588E-78A6D13CA3F8}"/>
+              </a:ext>
+            </a:extLst>
+          </p:cNvPr>
+          <p:cNvSpPr txBox="1"/>
+          <p:nvPr/>
+        </p:nvSpPr>
+        <p:spPr>
+          <a:xfrm>
+            <a:off x="2416284" y="3083038"/>
+            <a:ext cx="669908" cy="246221"/>
+          </a:xfrm>
+          <a:prstGeom prst="rect">
+            <a:avLst/>
+          </a:prstGeom>
+          <a:noFill/>
+        </p:spPr>
+        <p:txBody>
+          <a:bodyPr wrap="square" rtlCol="0">
+            <a:spAutoFit/>
+          </a:bodyPr>
+          <a:lstStyle/>
+          <a:p>
+            <a:pPr algn="ctr"/>
+            <a:r>
+              <a:rPr lang="de-DE" sz="1000" dirty="0" err="1"/>
+              <a:t>Ack</a:t>
+            </a:r>
+            <a:r>
+              <a:rPr lang="de-DE" sz="1000" dirty="0"/>
+              <a:t> 1</a:t>
+            </a:r>
+          </a:p>
+        </p:txBody>
+      </p:sp>
+      <p:sp>
+        <p:nvSpPr>
+          <p:cNvPr id="37" name="Textfeld 36">
+            <a:extLst>
+              <a:ext uri="{FF2B5EF4-FFF2-40B4-BE49-F238E27FC236}">
+                <a16:creationId xmlns:a16="http://schemas.microsoft.com/office/drawing/2014/main" id="{3DBC5565-F926-835D-7FC0-D473B27A359E}"/>
+              </a:ext>
+            </a:extLst>
+          </p:cNvPr>
+          <p:cNvSpPr txBox="1"/>
+          <p:nvPr/>
+        </p:nvSpPr>
+        <p:spPr>
+          <a:xfrm>
+            <a:off x="2460188" y="3416220"/>
+            <a:ext cx="669908" cy="246221"/>
+          </a:xfrm>
+          <a:prstGeom prst="rect">
+            <a:avLst/>
+          </a:prstGeom>
+          <a:noFill/>
+        </p:spPr>
+        <p:txBody>
+          <a:bodyPr wrap="square" rtlCol="0">
+            <a:spAutoFit/>
+          </a:bodyPr>
+          <a:lstStyle/>
+          <a:p>
+            <a:pPr algn="ctr"/>
+            <a:r>
+              <a:rPr lang="de-DE" sz="1000" dirty="0"/>
+              <a:t>Data 2</a:t>
+            </a:r>
+          </a:p>
+        </p:txBody>
+      </p:sp>
+      <p:sp>
+        <p:nvSpPr>
+          <p:cNvPr id="39" name="Textfeld 38">
+            <a:extLst>
+              <a:ext uri="{FF2B5EF4-FFF2-40B4-BE49-F238E27FC236}">
+                <a16:creationId xmlns:a16="http://schemas.microsoft.com/office/drawing/2014/main" id="{206F7BBC-EBC4-1063-D6E0-E0AFBF94FC9D}"/>
+              </a:ext>
+            </a:extLst>
+          </p:cNvPr>
+          <p:cNvSpPr txBox="1"/>
+          <p:nvPr/>
+        </p:nvSpPr>
+        <p:spPr>
+          <a:xfrm>
+            <a:off x="2460188" y="3870580"/>
+            <a:ext cx="669908" cy="246221"/>
+          </a:xfrm>
+          <a:prstGeom prst="rect">
+            <a:avLst/>
+          </a:prstGeom>
+          <a:noFill/>
+        </p:spPr>
+        <p:txBody>
+          <a:bodyPr wrap="square" rtlCol="0">
+            <a:spAutoFit/>
+          </a:bodyPr>
+          <a:lstStyle/>
+          <a:p>
+            <a:pPr algn="ctr"/>
+            <a:r>
+              <a:rPr lang="de-DE" sz="1000" dirty="0" err="1"/>
+              <a:t>Ack</a:t>
+            </a:r>
+            <a:r>
+              <a:rPr lang="de-DE" sz="1000" dirty="0"/>
+              <a:t> 2</a:t>
+            </a:r>
+          </a:p>
+        </p:txBody>
+      </p:sp>
+      <p:sp>
+        <p:nvSpPr>
+          <p:cNvPr id="41" name="Textfeld 40">
+            <a:extLst>
+              <a:ext uri="{FF2B5EF4-FFF2-40B4-BE49-F238E27FC236}">
+                <a16:creationId xmlns:a16="http://schemas.microsoft.com/office/drawing/2014/main" id="{8B8B32B8-20E8-8D09-DCFC-508BDC0B034A}"/>
+              </a:ext>
+            </a:extLst>
+          </p:cNvPr>
+          <p:cNvSpPr txBox="1"/>
+          <p:nvPr/>
+        </p:nvSpPr>
+        <p:spPr>
+          <a:xfrm>
+            <a:off x="2460188" y="4291532"/>
+            <a:ext cx="669908" cy="246221"/>
+          </a:xfrm>
+          <a:prstGeom prst="rect">
+            <a:avLst/>
+          </a:prstGeom>
+          <a:noFill/>
+        </p:spPr>
+        <p:txBody>
+          <a:bodyPr wrap="square" rtlCol="0">
+            <a:spAutoFit/>
+          </a:bodyPr>
+          <a:lstStyle/>
+          <a:p>
+            <a:pPr algn="ctr"/>
+            <a:r>
+              <a:rPr lang="de-DE" sz="1000" dirty="0"/>
+              <a:t>FIN</a:t>
+            </a:r>
+          </a:p>
+        </p:txBody>
+      </p:sp>
+      <p:sp>
+        <p:nvSpPr>
+          <p:cNvPr id="43" name="Textfeld 42">
+            <a:extLst>
+              <a:ext uri="{FF2B5EF4-FFF2-40B4-BE49-F238E27FC236}">
+                <a16:creationId xmlns:a16="http://schemas.microsoft.com/office/drawing/2014/main" id="{B48F3958-FB7B-1DE6-8A28-68BF72D57621}"/>
+              </a:ext>
+            </a:extLst>
+          </p:cNvPr>
+          <p:cNvSpPr txBox="1"/>
+          <p:nvPr/>
+        </p:nvSpPr>
+        <p:spPr>
+          <a:xfrm>
+            <a:off x="2460188" y="4745892"/>
+            <a:ext cx="669908" cy="246221"/>
+          </a:xfrm>
+          <a:prstGeom prst="rect">
+            <a:avLst/>
+          </a:prstGeom>
+          <a:noFill/>
+        </p:spPr>
+        <p:txBody>
+          <a:bodyPr wrap="square" rtlCol="0">
+            <a:spAutoFit/>
+          </a:bodyPr>
+          <a:lstStyle/>
+          <a:p>
+            <a:pPr algn="ctr"/>
+            <a:r>
+              <a:rPr lang="de-DE" sz="1000" dirty="0"/>
+              <a:t>FIN</a:t>
+            </a:r>
+          </a:p>
+        </p:txBody>
+      </p:sp>
+      <p:sp>
+        <p:nvSpPr>
+          <p:cNvPr id="45" name="Textfeld 44">
+            <a:extLst>
+              <a:ext uri="{FF2B5EF4-FFF2-40B4-BE49-F238E27FC236}">
+                <a16:creationId xmlns:a16="http://schemas.microsoft.com/office/drawing/2014/main" id="{9E1713B6-8E4C-F39A-989A-CD4BB9547F69}"/>
+              </a:ext>
+            </a:extLst>
+          </p:cNvPr>
+          <p:cNvSpPr txBox="1"/>
+          <p:nvPr/>
+        </p:nvSpPr>
+        <p:spPr>
+          <a:xfrm>
+            <a:off x="4083286" y="4937391"/>
+            <a:ext cx="669908" cy="246221"/>
+          </a:xfrm>
+          <a:prstGeom prst="rect">
+            <a:avLst/>
+          </a:prstGeom>
+          <a:noFill/>
+        </p:spPr>
+        <p:txBody>
+          <a:bodyPr wrap="square" rtlCol="0">
+            <a:spAutoFit/>
+          </a:bodyPr>
+          <a:lstStyle/>
+          <a:p>
+            <a:r>
+              <a:rPr lang="de-DE" sz="1000" dirty="0"/>
+              <a:t>Idle</a:t>
+            </a:r>
+          </a:p>
+        </p:txBody>
+      </p:sp>
+      <p:sp>
+        <p:nvSpPr>
+          <p:cNvPr id="49" name="Textfeld 48">
+            <a:extLst>
+              <a:ext uri="{FF2B5EF4-FFF2-40B4-BE49-F238E27FC236}">
+                <a16:creationId xmlns:a16="http://schemas.microsoft.com/office/drawing/2014/main" id="{DE51BE5E-B3AC-AA6E-E9D7-1DE2041679DB}"/>
+              </a:ext>
+            </a:extLst>
+          </p:cNvPr>
+          <p:cNvSpPr txBox="1"/>
+          <p:nvPr/>
+        </p:nvSpPr>
+        <p:spPr>
+          <a:xfrm>
+            <a:off x="742547" y="5100218"/>
+            <a:ext cx="669908" cy="246221"/>
+          </a:xfrm>
+          <a:prstGeom prst="rect">
+            <a:avLst/>
+          </a:prstGeom>
+          <a:noFill/>
+        </p:spPr>
+        <p:txBody>
+          <a:bodyPr wrap="square" rtlCol="0">
+            <a:spAutoFit/>
+          </a:bodyPr>
+          <a:lstStyle/>
+          <a:p>
+            <a:pPr algn="r"/>
+            <a:r>
+              <a:rPr lang="de-DE" sz="1000" dirty="0"/>
+              <a:t>Idle</a:t>
+            </a:r>
+          </a:p>
+        </p:txBody>
+      </p:sp>
+      <p:cxnSp>
+        <p:nvCxnSpPr>
+          <p:cNvPr id="51" name="Gerade Verbindung mit Pfeil 50">
+            <a:extLst>
+              <a:ext uri="{FF2B5EF4-FFF2-40B4-BE49-F238E27FC236}">
+                <a16:creationId xmlns:a16="http://schemas.microsoft.com/office/drawing/2014/main" id="{3FEEEF90-16E0-01C6-A9BE-0F711E592C05}"/>
+              </a:ext>
+            </a:extLst>
+          </p:cNvPr>
+          <p:cNvCxnSpPr/>
+          <p:nvPr/>
+        </p:nvCxnSpPr>
+        <p:spPr>
+          <a:xfrm>
+            <a:off x="4113440" y="4794584"/>
+            <a:ext cx="1156392" cy="74418"/>
+          </a:xfrm>
+          <a:prstGeom prst="straightConnector1">
+            <a:avLst/>
+          </a:prstGeom>
+          <a:ln>
+            <a:solidFill>
+              <a:schemeClr val="tx1"/>
+            </a:solidFill>
+            <a:tailEnd type="triangle"/>
+          </a:ln>
+        </p:spPr>
+        <p:style>
+          <a:lnRef idx="2">
+            <a:schemeClr val="accent1"/>
+          </a:lnRef>
+          <a:fillRef idx="0">
+            <a:schemeClr val="accent1"/>
+          </a:fillRef>
+          <a:effectRef idx="1">
+            <a:schemeClr val="accent1"/>
+          </a:effectRef>
+          <a:fontRef idx="minor">
+            <a:schemeClr val="tx1"/>
+          </a:fontRef>
+        </p:style>
+      </p:cxnSp>
+      <p:cxnSp>
+        <p:nvCxnSpPr>
+          <p:cNvPr id="52" name="Gerade Verbindung mit Pfeil 51">
+            <a:extLst>
+              <a:ext uri="{FF2B5EF4-FFF2-40B4-BE49-F238E27FC236}">
+                <a16:creationId xmlns:a16="http://schemas.microsoft.com/office/drawing/2014/main" id="{32670AE1-EF5B-4B52-B1F3-076CB9ECDA1C}"/>
+              </a:ext>
+            </a:extLst>
+          </p:cNvPr>
+          <p:cNvCxnSpPr>
+            <a:cxnSpLocks/>
+          </p:cNvCxnSpPr>
+          <p:nvPr/>
+        </p:nvCxnSpPr>
+        <p:spPr>
+          <a:xfrm>
+            <a:off x="7974238" y="2967724"/>
+            <a:ext cx="2431143" cy="150692"/>
+          </a:xfrm>
+          <a:prstGeom prst="straightConnector1">
+            <a:avLst/>
+          </a:prstGeom>
+          <a:ln>
+            <a:solidFill>
+              <a:schemeClr val="tx1"/>
+            </a:solidFill>
+            <a:tailEnd type="triangle"/>
+          </a:ln>
+        </p:spPr>
+        <p:style>
+          <a:lnRef idx="2">
+            <a:schemeClr val="accent1"/>
+          </a:lnRef>
+          <a:fillRef idx="0">
+            <a:schemeClr val="accent1"/>
+          </a:fillRef>
+          <a:effectRef idx="1">
+            <a:schemeClr val="accent1"/>
+          </a:effectRef>
+          <a:fontRef idx="minor">
+            <a:schemeClr val="tx1"/>
+          </a:fontRef>
+        </p:style>
+      </p:cxnSp>
+      <p:sp>
+        <p:nvSpPr>
+          <p:cNvPr id="53" name="Textfeld 52">
+            <a:extLst>
+              <a:ext uri="{FF2B5EF4-FFF2-40B4-BE49-F238E27FC236}">
+                <a16:creationId xmlns:a16="http://schemas.microsoft.com/office/drawing/2014/main" id="{1E0DF304-36CE-1B98-4843-4E406C26D4AD}"/>
+              </a:ext>
+            </a:extLst>
+          </p:cNvPr>
+          <p:cNvSpPr txBox="1"/>
+          <p:nvPr/>
+        </p:nvSpPr>
+        <p:spPr>
+          <a:xfrm>
+            <a:off x="7159188" y="2254495"/>
+            <a:ext cx="669908" cy="246221"/>
+          </a:xfrm>
+          <a:prstGeom prst="rect">
+            <a:avLst/>
+          </a:prstGeom>
+          <a:noFill/>
+        </p:spPr>
+        <p:txBody>
+          <a:bodyPr wrap="square" rtlCol="0">
+            <a:spAutoFit/>
+          </a:bodyPr>
+          <a:lstStyle/>
+          <a:p>
+            <a:pPr algn="r"/>
+            <a:r>
+              <a:rPr lang="de-DE" sz="1000" dirty="0"/>
+              <a:t>Idle</a:t>
+            </a:r>
+          </a:p>
+        </p:txBody>
+      </p:sp>
+      <p:sp>
+        <p:nvSpPr>
+          <p:cNvPr id="54" name="Textfeld 53">
+            <a:extLst>
+              <a:ext uri="{FF2B5EF4-FFF2-40B4-BE49-F238E27FC236}">
+                <a16:creationId xmlns:a16="http://schemas.microsoft.com/office/drawing/2014/main" id="{ECEB8FC7-B4B5-D598-C7DE-89E3E6A05D58}"/>
+              </a:ext>
+            </a:extLst>
+          </p:cNvPr>
+          <p:cNvSpPr txBox="1"/>
+          <p:nvPr/>
+        </p:nvSpPr>
+        <p:spPr>
+          <a:xfrm>
+            <a:off x="10550525" y="2277262"/>
+            <a:ext cx="669908" cy="246221"/>
+          </a:xfrm>
+          <a:prstGeom prst="rect">
+            <a:avLst/>
+          </a:prstGeom>
+          <a:noFill/>
+        </p:spPr>
+        <p:txBody>
+          <a:bodyPr wrap="square" rtlCol="0">
+            <a:spAutoFit/>
+          </a:bodyPr>
+          <a:lstStyle/>
+          <a:p>
+            <a:r>
+              <a:rPr lang="de-DE" sz="1000" dirty="0"/>
+              <a:t>Idle</a:t>
+            </a:r>
+          </a:p>
+        </p:txBody>
+      </p:sp>
+      <p:cxnSp>
+        <p:nvCxnSpPr>
+          <p:cNvPr id="55" name="Gerade Verbindung mit Pfeil 54">
+            <a:extLst>
+              <a:ext uri="{FF2B5EF4-FFF2-40B4-BE49-F238E27FC236}">
+                <a16:creationId xmlns:a16="http://schemas.microsoft.com/office/drawing/2014/main" id="{9B05477F-DCB1-6760-CF7A-7C5A40B09B79}"/>
+              </a:ext>
+            </a:extLst>
+          </p:cNvPr>
+          <p:cNvCxnSpPr/>
+          <p:nvPr/>
+        </p:nvCxnSpPr>
+        <p:spPr>
+          <a:xfrm>
+            <a:off x="6588670" y="2523483"/>
+            <a:ext cx="1240426" cy="43414"/>
+          </a:xfrm>
+          <a:prstGeom prst="straightConnector1">
+            <a:avLst/>
+          </a:prstGeom>
+          <a:ln>
+            <a:solidFill>
+              <a:schemeClr val="tx1"/>
+            </a:solidFill>
+            <a:tailEnd type="triangle"/>
+          </a:ln>
+        </p:spPr>
+        <p:style>
+          <a:lnRef idx="2">
+            <a:schemeClr val="accent1"/>
+          </a:lnRef>
+          <a:fillRef idx="0">
+            <a:schemeClr val="accent1"/>
+          </a:fillRef>
+          <a:effectRef idx="1">
+            <a:schemeClr val="accent1"/>
+          </a:effectRef>
+          <a:fontRef idx="minor">
+            <a:schemeClr val="tx1"/>
+          </a:fontRef>
+        </p:style>
+      </p:cxnSp>
+      <p:sp>
+        <p:nvSpPr>
+          <p:cNvPr id="56" name="Textfeld 55">
+            <a:extLst>
+              <a:ext uri="{FF2B5EF4-FFF2-40B4-BE49-F238E27FC236}">
+                <a16:creationId xmlns:a16="http://schemas.microsoft.com/office/drawing/2014/main" id="{FEF2EEC4-F86E-0F2E-08ED-3A7AD0B4FB2E}"/>
+              </a:ext>
+            </a:extLst>
+          </p:cNvPr>
+          <p:cNvSpPr txBox="1"/>
+          <p:nvPr/>
+        </p:nvSpPr>
+        <p:spPr>
+          <a:xfrm>
+            <a:off x="7159188" y="2669280"/>
+            <a:ext cx="669908" cy="246221"/>
+          </a:xfrm>
+          <a:prstGeom prst="rect">
+            <a:avLst/>
+          </a:prstGeom>
+          <a:noFill/>
+        </p:spPr>
+        <p:txBody>
+          <a:bodyPr wrap="square" rtlCol="0">
+            <a:spAutoFit/>
+          </a:bodyPr>
+          <a:lstStyle/>
+          <a:p>
+            <a:pPr algn="r"/>
+            <a:r>
+              <a:rPr lang="de-DE" sz="1000" dirty="0"/>
+              <a:t>Send</a:t>
+            </a:r>
+          </a:p>
+        </p:txBody>
+      </p:sp>
+      <p:sp>
+        <p:nvSpPr>
+          <p:cNvPr id="57" name="Textfeld 56">
+            <a:extLst>
+              <a:ext uri="{FF2B5EF4-FFF2-40B4-BE49-F238E27FC236}">
+                <a16:creationId xmlns:a16="http://schemas.microsoft.com/office/drawing/2014/main" id="{FD184331-C941-E5D0-E09D-C4FD4C5942BA}"/>
+              </a:ext>
+            </a:extLst>
+          </p:cNvPr>
+          <p:cNvSpPr txBox="1"/>
+          <p:nvPr/>
+        </p:nvSpPr>
+        <p:spPr>
+          <a:xfrm>
+            <a:off x="10550525" y="3182445"/>
+            <a:ext cx="669908" cy="246221"/>
+          </a:xfrm>
+          <a:prstGeom prst="rect">
+            <a:avLst/>
+          </a:prstGeom>
+          <a:noFill/>
+        </p:spPr>
+        <p:txBody>
+          <a:bodyPr wrap="square" rtlCol="0">
+            <a:spAutoFit/>
+          </a:bodyPr>
+          <a:lstStyle/>
+          <a:p>
+            <a:r>
+              <a:rPr lang="de-DE" sz="1000" dirty="0" err="1"/>
+              <a:t>Receive</a:t>
+            </a:r>
+            <a:endParaRPr lang="de-DE" sz="1000" dirty="0"/>
+          </a:p>
+        </p:txBody>
+      </p:sp>
+      <p:cxnSp>
+        <p:nvCxnSpPr>
+          <p:cNvPr id="58" name="Gerade Verbindung mit Pfeil 57">
+            <a:extLst>
+              <a:ext uri="{FF2B5EF4-FFF2-40B4-BE49-F238E27FC236}">
+                <a16:creationId xmlns:a16="http://schemas.microsoft.com/office/drawing/2014/main" id="{83A99BF4-65AD-6D76-2CCE-5EB72C0B6605}"/>
+              </a:ext>
+            </a:extLst>
+          </p:cNvPr>
+          <p:cNvCxnSpPr>
+            <a:cxnSpLocks/>
+          </p:cNvCxnSpPr>
+          <p:nvPr/>
+        </p:nvCxnSpPr>
+        <p:spPr>
+          <a:xfrm flipH="1">
+            <a:off x="8964839" y="3428666"/>
+            <a:ext cx="1440542" cy="55024"/>
+          </a:xfrm>
+          <a:prstGeom prst="straightConnector1">
+            <a:avLst/>
+          </a:prstGeom>
+          <a:ln>
+            <a:solidFill>
+              <a:schemeClr val="tx1"/>
+            </a:solidFill>
+            <a:tailEnd type="triangle"/>
+          </a:ln>
+        </p:spPr>
+        <p:style>
+          <a:lnRef idx="2">
+            <a:schemeClr val="accent1"/>
+          </a:lnRef>
+          <a:fillRef idx="0">
+            <a:schemeClr val="accent1"/>
+          </a:fillRef>
+          <a:effectRef idx="1">
+            <a:schemeClr val="accent1"/>
+          </a:effectRef>
+          <a:fontRef idx="minor">
+            <a:schemeClr val="tx1"/>
+          </a:fontRef>
+        </p:style>
+      </p:cxnSp>
+      <p:sp>
+        <p:nvSpPr>
+          <p:cNvPr id="63" name="Textfeld 62">
+            <a:extLst>
+              <a:ext uri="{FF2B5EF4-FFF2-40B4-BE49-F238E27FC236}">
+                <a16:creationId xmlns:a16="http://schemas.microsoft.com/office/drawing/2014/main" id="{2C1374D3-E24B-30CA-F10D-0DD6E383D1C9}"/>
+              </a:ext>
+            </a:extLst>
+          </p:cNvPr>
+          <p:cNvSpPr txBox="1"/>
+          <p:nvPr/>
+        </p:nvSpPr>
+        <p:spPr>
+          <a:xfrm>
+            <a:off x="8853369" y="2799554"/>
+            <a:ext cx="669908" cy="246221"/>
+          </a:xfrm>
+          <a:prstGeom prst="rect">
+            <a:avLst/>
+          </a:prstGeom>
+          <a:noFill/>
+        </p:spPr>
+        <p:txBody>
+          <a:bodyPr wrap="square" rtlCol="0">
+            <a:spAutoFit/>
+          </a:bodyPr>
+          <a:lstStyle/>
+          <a:p>
+            <a:pPr algn="ctr"/>
+            <a:r>
+              <a:rPr lang="de-DE" sz="1000" dirty="0"/>
+              <a:t>Data 1</a:t>
+            </a:r>
+          </a:p>
+        </p:txBody>
+      </p:sp>
+      <p:sp>
+        <p:nvSpPr>
+          <p:cNvPr id="64" name="Textfeld 63">
+            <a:extLst>
+              <a:ext uri="{FF2B5EF4-FFF2-40B4-BE49-F238E27FC236}">
+                <a16:creationId xmlns:a16="http://schemas.microsoft.com/office/drawing/2014/main" id="{F0528C37-6830-64B2-456E-A380DF4959CA}"/>
+              </a:ext>
+            </a:extLst>
+          </p:cNvPr>
+          <p:cNvSpPr txBox="1"/>
+          <p:nvPr/>
+        </p:nvSpPr>
+        <p:spPr>
+          <a:xfrm>
+            <a:off x="8853369" y="3253914"/>
+            <a:ext cx="669908" cy="246221"/>
+          </a:xfrm>
+          <a:prstGeom prst="rect">
+            <a:avLst/>
+          </a:prstGeom>
+          <a:noFill/>
+        </p:spPr>
+        <p:txBody>
+          <a:bodyPr wrap="square" rtlCol="0">
+            <a:spAutoFit/>
+          </a:bodyPr>
+          <a:lstStyle/>
+          <a:p>
+            <a:pPr algn="ctr"/>
+            <a:r>
+              <a:rPr lang="de-DE" sz="1000" dirty="0" err="1"/>
+              <a:t>Ack</a:t>
+            </a:r>
+            <a:r>
+              <a:rPr lang="de-DE" sz="1000" dirty="0"/>
+              <a:t> 1</a:t>
+            </a:r>
+          </a:p>
+        </p:txBody>
+      </p:sp>
+      <p:cxnSp>
+        <p:nvCxnSpPr>
+          <p:cNvPr id="77" name="Gerade Verbindung mit Pfeil 76">
+            <a:extLst>
+              <a:ext uri="{FF2B5EF4-FFF2-40B4-BE49-F238E27FC236}">
+                <a16:creationId xmlns:a16="http://schemas.microsoft.com/office/drawing/2014/main" id="{BC64D403-9E4B-96C1-7E69-EA19464F6036}"/>
+              </a:ext>
+            </a:extLst>
+          </p:cNvPr>
+          <p:cNvCxnSpPr>
+            <a:cxnSpLocks/>
+          </p:cNvCxnSpPr>
+          <p:nvPr/>
+        </p:nvCxnSpPr>
+        <p:spPr>
+          <a:xfrm>
+            <a:off x="7974237" y="3906666"/>
+            <a:ext cx="2431143" cy="150692"/>
+          </a:xfrm>
+          <a:prstGeom prst="straightConnector1">
+            <a:avLst/>
+          </a:prstGeom>
+          <a:ln>
+            <a:solidFill>
+              <a:schemeClr val="tx1"/>
+            </a:solidFill>
+            <a:tailEnd type="triangle"/>
+          </a:ln>
+        </p:spPr>
+        <p:style>
+          <a:lnRef idx="2">
+            <a:schemeClr val="accent1"/>
+          </a:lnRef>
+          <a:fillRef idx="0">
+            <a:schemeClr val="accent1"/>
+          </a:fillRef>
+          <a:effectRef idx="1">
+            <a:schemeClr val="accent1"/>
+          </a:effectRef>
+          <a:fontRef idx="minor">
+            <a:schemeClr val="tx1"/>
+          </a:fontRef>
+        </p:style>
+      </p:cxnSp>
+      <p:cxnSp>
+        <p:nvCxnSpPr>
+          <p:cNvPr id="81" name="Gerade Verbindung mit Pfeil 80">
+            <a:extLst>
+              <a:ext uri="{FF2B5EF4-FFF2-40B4-BE49-F238E27FC236}">
+                <a16:creationId xmlns:a16="http://schemas.microsoft.com/office/drawing/2014/main" id="{32FE7423-5E0E-75B0-F697-9BBD2416405E}"/>
+              </a:ext>
+            </a:extLst>
+          </p:cNvPr>
+          <p:cNvCxnSpPr/>
+          <p:nvPr/>
+        </p:nvCxnSpPr>
+        <p:spPr>
+          <a:xfrm flipH="1">
+            <a:off x="7974237" y="4367608"/>
+            <a:ext cx="2431143" cy="130869"/>
+          </a:xfrm>
+          <a:prstGeom prst="straightConnector1">
+            <a:avLst/>
+          </a:prstGeom>
+          <a:ln>
+            <a:solidFill>
+              <a:schemeClr val="tx1"/>
+            </a:solidFill>
+            <a:tailEnd type="triangle"/>
+          </a:ln>
+        </p:spPr>
+        <p:style>
+          <a:lnRef idx="2">
+            <a:schemeClr val="accent1"/>
+          </a:lnRef>
+          <a:fillRef idx="0">
+            <a:schemeClr val="accent1"/>
+          </a:fillRef>
+          <a:effectRef idx="1">
+            <a:schemeClr val="accent1"/>
+          </a:effectRef>
+          <a:fontRef idx="minor">
+            <a:schemeClr val="tx1"/>
+          </a:fontRef>
+        </p:style>
+      </p:cxnSp>
+      <p:cxnSp>
+        <p:nvCxnSpPr>
+          <p:cNvPr id="83" name="Gerade Verbindung mit Pfeil 82">
+            <a:extLst>
+              <a:ext uri="{FF2B5EF4-FFF2-40B4-BE49-F238E27FC236}">
+                <a16:creationId xmlns:a16="http://schemas.microsoft.com/office/drawing/2014/main" id="{A99450F1-41CD-FCC5-D00B-8CBEBF1EB746}"/>
+              </a:ext>
+            </a:extLst>
+          </p:cNvPr>
+          <p:cNvCxnSpPr>
+            <a:cxnSpLocks/>
+          </p:cNvCxnSpPr>
+          <p:nvPr/>
+        </p:nvCxnSpPr>
+        <p:spPr>
+          <a:xfrm>
+            <a:off x="7961538" y="4682033"/>
+            <a:ext cx="2431143" cy="150692"/>
+          </a:xfrm>
+          <a:prstGeom prst="straightConnector1">
+            <a:avLst/>
+          </a:prstGeom>
+          <a:ln>
+            <a:solidFill>
+              <a:schemeClr val="tx1"/>
+            </a:solidFill>
+            <a:tailEnd type="triangle"/>
+          </a:ln>
+        </p:spPr>
+        <p:style>
+          <a:lnRef idx="2">
+            <a:schemeClr val="accent1"/>
+          </a:lnRef>
+          <a:fillRef idx="0">
+            <a:schemeClr val="accent1"/>
+          </a:fillRef>
+          <a:effectRef idx="1">
+            <a:schemeClr val="accent1"/>
+          </a:effectRef>
+          <a:fontRef idx="minor">
+            <a:schemeClr val="tx1"/>
+          </a:fontRef>
+        </p:style>
+      </p:cxnSp>
+      <p:cxnSp>
+        <p:nvCxnSpPr>
+          <p:cNvPr id="85" name="Gerade Verbindung mit Pfeil 84">
+            <a:extLst>
+              <a:ext uri="{FF2B5EF4-FFF2-40B4-BE49-F238E27FC236}">
+                <a16:creationId xmlns:a16="http://schemas.microsoft.com/office/drawing/2014/main" id="{CDA091FD-260A-1422-6C2A-F0C506771693}"/>
+              </a:ext>
+            </a:extLst>
+          </p:cNvPr>
+          <p:cNvCxnSpPr/>
+          <p:nvPr/>
+        </p:nvCxnSpPr>
+        <p:spPr>
+          <a:xfrm flipH="1">
+            <a:off x="7961538" y="5142975"/>
+            <a:ext cx="2431143" cy="130869"/>
+          </a:xfrm>
+          <a:prstGeom prst="straightConnector1">
+            <a:avLst/>
+          </a:prstGeom>
+          <a:ln>
+            <a:solidFill>
+              <a:schemeClr val="tx1"/>
+            </a:solidFill>
+            <a:tailEnd type="triangle"/>
+          </a:ln>
+        </p:spPr>
+        <p:style>
+          <a:lnRef idx="2">
+            <a:schemeClr val="accent1"/>
+          </a:lnRef>
+          <a:fillRef idx="0">
+            <a:schemeClr val="accent1"/>
+          </a:fillRef>
+          <a:effectRef idx="1">
+            <a:schemeClr val="accent1"/>
+          </a:effectRef>
+          <a:fontRef idx="minor">
+            <a:schemeClr val="tx1"/>
+          </a:fontRef>
+        </p:style>
+      </p:cxnSp>
+      <p:cxnSp>
+        <p:nvCxnSpPr>
+          <p:cNvPr id="86" name="Gerade Verbindung mit Pfeil 85">
+            <a:extLst>
+              <a:ext uri="{FF2B5EF4-FFF2-40B4-BE49-F238E27FC236}">
+                <a16:creationId xmlns:a16="http://schemas.microsoft.com/office/drawing/2014/main" id="{907531F9-8C01-63EF-681D-8BDEBDD9DFBC}"/>
+              </a:ext>
+            </a:extLst>
+          </p:cNvPr>
+          <p:cNvCxnSpPr>
+            <a:cxnSpLocks/>
+          </p:cNvCxnSpPr>
+          <p:nvPr/>
+        </p:nvCxnSpPr>
+        <p:spPr>
+          <a:xfrm>
+            <a:off x="7974238" y="5560867"/>
+            <a:ext cx="2431143" cy="150692"/>
+          </a:xfrm>
+          <a:prstGeom prst="straightConnector1">
+            <a:avLst/>
+          </a:prstGeom>
+          <a:ln>
+            <a:solidFill>
+              <a:schemeClr val="tx1"/>
+            </a:solidFill>
+            <a:tailEnd type="triangle"/>
+          </a:ln>
+        </p:spPr>
+        <p:style>
+          <a:lnRef idx="2">
+            <a:schemeClr val="accent1"/>
+          </a:lnRef>
+          <a:fillRef idx="0">
+            <a:schemeClr val="accent1"/>
+          </a:fillRef>
+          <a:effectRef idx="1">
+            <a:schemeClr val="accent1"/>
+          </a:effectRef>
+          <a:fontRef idx="minor">
+            <a:schemeClr val="tx1"/>
+          </a:fontRef>
+        </p:style>
+      </p:cxnSp>
+      <p:cxnSp>
+        <p:nvCxnSpPr>
+          <p:cNvPr id="87" name="Gerade Verbindung mit Pfeil 86">
+            <a:extLst>
+              <a:ext uri="{FF2B5EF4-FFF2-40B4-BE49-F238E27FC236}">
+                <a16:creationId xmlns:a16="http://schemas.microsoft.com/office/drawing/2014/main" id="{53C014CE-B117-C246-BE76-67064ECDC375}"/>
+              </a:ext>
+            </a:extLst>
+          </p:cNvPr>
+          <p:cNvCxnSpPr/>
+          <p:nvPr/>
+        </p:nvCxnSpPr>
+        <p:spPr>
+          <a:xfrm flipH="1">
+            <a:off x="7974238" y="6021809"/>
+            <a:ext cx="2431143" cy="130869"/>
+          </a:xfrm>
+          <a:prstGeom prst="straightConnector1">
+            <a:avLst/>
+          </a:prstGeom>
+          <a:ln>
+            <a:solidFill>
+              <a:schemeClr val="tx1"/>
+            </a:solidFill>
+            <a:tailEnd type="triangle"/>
+          </a:ln>
+        </p:spPr>
+        <p:style>
+          <a:lnRef idx="2">
+            <a:schemeClr val="accent1"/>
+          </a:lnRef>
+          <a:fillRef idx="0">
+            <a:schemeClr val="accent1"/>
+          </a:fillRef>
+          <a:effectRef idx="1">
+            <a:schemeClr val="accent1"/>
+          </a:effectRef>
+          <a:fontRef idx="minor">
+            <a:schemeClr val="tx1"/>
+          </a:fontRef>
+        </p:style>
+      </p:cxnSp>
+      <p:sp>
+        <p:nvSpPr>
+          <p:cNvPr id="88" name="Textfeld 87">
+            <a:extLst>
+              <a:ext uri="{FF2B5EF4-FFF2-40B4-BE49-F238E27FC236}">
+                <a16:creationId xmlns:a16="http://schemas.microsoft.com/office/drawing/2014/main" id="{11DF1691-E61E-C6CF-8890-8FDC2941E749}"/>
+              </a:ext>
+            </a:extLst>
+          </p:cNvPr>
+          <p:cNvSpPr txBox="1"/>
+          <p:nvPr/>
+        </p:nvSpPr>
+        <p:spPr>
+          <a:xfrm>
+            <a:off x="8853368" y="3738496"/>
+            <a:ext cx="669908" cy="246221"/>
+          </a:xfrm>
+          <a:prstGeom prst="rect">
+            <a:avLst/>
+          </a:prstGeom>
+          <a:noFill/>
+        </p:spPr>
+        <p:txBody>
+          <a:bodyPr wrap="square" rtlCol="0">
+            <a:spAutoFit/>
+          </a:bodyPr>
+          <a:lstStyle/>
+          <a:p>
+            <a:pPr algn="ctr"/>
+            <a:r>
+              <a:rPr lang="de-DE" sz="1000" dirty="0"/>
+              <a:t>Data 1</a:t>
+            </a:r>
+          </a:p>
+        </p:txBody>
+      </p:sp>
+      <p:sp>
+        <p:nvSpPr>
+          <p:cNvPr id="89" name="Textfeld 88">
+            <a:extLst>
+              <a:ext uri="{FF2B5EF4-FFF2-40B4-BE49-F238E27FC236}">
+                <a16:creationId xmlns:a16="http://schemas.microsoft.com/office/drawing/2014/main" id="{71E81E09-DCB2-0C33-AFE1-15C78936101F}"/>
+              </a:ext>
+            </a:extLst>
+          </p:cNvPr>
+          <p:cNvSpPr txBox="1"/>
+          <p:nvPr/>
+        </p:nvSpPr>
+        <p:spPr>
+          <a:xfrm>
+            <a:off x="8853368" y="4192856"/>
+            <a:ext cx="669908" cy="246221"/>
+          </a:xfrm>
+          <a:prstGeom prst="rect">
+            <a:avLst/>
+          </a:prstGeom>
+          <a:noFill/>
+        </p:spPr>
+        <p:txBody>
+          <a:bodyPr wrap="square" rtlCol="0">
+            <a:spAutoFit/>
+          </a:bodyPr>
+          <a:lstStyle/>
+          <a:p>
+            <a:pPr algn="ctr"/>
+            <a:r>
+              <a:rPr lang="de-DE" sz="1000" dirty="0" err="1"/>
+              <a:t>Ack</a:t>
+            </a:r>
+            <a:r>
+              <a:rPr lang="de-DE" sz="1000" dirty="0"/>
+              <a:t> 1</a:t>
+            </a:r>
+          </a:p>
+        </p:txBody>
+      </p:sp>
+      <p:sp>
+        <p:nvSpPr>
+          <p:cNvPr id="90" name="Textfeld 89">
+            <a:extLst>
+              <a:ext uri="{FF2B5EF4-FFF2-40B4-BE49-F238E27FC236}">
+                <a16:creationId xmlns:a16="http://schemas.microsoft.com/office/drawing/2014/main" id="{417D34F9-EB4C-ED6C-4E68-929577C5935E}"/>
+              </a:ext>
+            </a:extLst>
+          </p:cNvPr>
+          <p:cNvSpPr txBox="1"/>
+          <p:nvPr/>
+        </p:nvSpPr>
+        <p:spPr>
+          <a:xfrm>
+            <a:off x="8897272" y="4526038"/>
+            <a:ext cx="669908" cy="246221"/>
+          </a:xfrm>
+          <a:prstGeom prst="rect">
+            <a:avLst/>
+          </a:prstGeom>
+          <a:noFill/>
+        </p:spPr>
+        <p:txBody>
+          <a:bodyPr wrap="square" rtlCol="0">
+            <a:spAutoFit/>
+          </a:bodyPr>
+          <a:lstStyle/>
+          <a:p>
+            <a:pPr algn="ctr"/>
+            <a:r>
+              <a:rPr lang="de-DE" sz="1000" dirty="0"/>
+              <a:t>Data 2</a:t>
+            </a:r>
+          </a:p>
+        </p:txBody>
+      </p:sp>
+      <p:sp>
+        <p:nvSpPr>
+          <p:cNvPr id="91" name="Textfeld 90">
+            <a:extLst>
+              <a:ext uri="{FF2B5EF4-FFF2-40B4-BE49-F238E27FC236}">
+                <a16:creationId xmlns:a16="http://schemas.microsoft.com/office/drawing/2014/main" id="{73139AA1-DA57-809A-BE04-2B0DF1F74670}"/>
+              </a:ext>
+            </a:extLst>
+          </p:cNvPr>
+          <p:cNvSpPr txBox="1"/>
+          <p:nvPr/>
+        </p:nvSpPr>
+        <p:spPr>
+          <a:xfrm>
+            <a:off x="8897272" y="4980398"/>
+            <a:ext cx="669908" cy="246221"/>
+          </a:xfrm>
+          <a:prstGeom prst="rect">
+            <a:avLst/>
+          </a:prstGeom>
+          <a:noFill/>
+        </p:spPr>
+        <p:txBody>
+          <a:bodyPr wrap="square" rtlCol="0">
+            <a:spAutoFit/>
+          </a:bodyPr>
+          <a:lstStyle/>
+          <a:p>
+            <a:pPr algn="ctr"/>
+            <a:r>
+              <a:rPr lang="de-DE" sz="1000" dirty="0" err="1"/>
+              <a:t>Ack</a:t>
+            </a:r>
+            <a:r>
+              <a:rPr lang="de-DE" sz="1000" dirty="0"/>
+              <a:t> 2</a:t>
+            </a:r>
+          </a:p>
+        </p:txBody>
+      </p:sp>
+      <p:sp>
+        <p:nvSpPr>
+          <p:cNvPr id="92" name="Textfeld 91">
+            <a:extLst>
+              <a:ext uri="{FF2B5EF4-FFF2-40B4-BE49-F238E27FC236}">
+                <a16:creationId xmlns:a16="http://schemas.microsoft.com/office/drawing/2014/main" id="{B65A21D0-26C3-BBA2-33D3-1FAFC686456B}"/>
+              </a:ext>
+            </a:extLst>
+          </p:cNvPr>
+          <p:cNvSpPr txBox="1"/>
+          <p:nvPr/>
+        </p:nvSpPr>
+        <p:spPr>
+          <a:xfrm>
+            <a:off x="8897272" y="5401350"/>
+            <a:ext cx="669908" cy="246221"/>
+          </a:xfrm>
+          <a:prstGeom prst="rect">
+            <a:avLst/>
+          </a:prstGeom>
+          <a:noFill/>
+        </p:spPr>
+        <p:txBody>
+          <a:bodyPr wrap="square" rtlCol="0">
+            <a:spAutoFit/>
+          </a:bodyPr>
+          <a:lstStyle/>
+          <a:p>
+            <a:pPr algn="ctr"/>
+            <a:r>
+              <a:rPr lang="de-DE" sz="1000" dirty="0"/>
+              <a:t>FIN</a:t>
+            </a:r>
+          </a:p>
+        </p:txBody>
+      </p:sp>
+      <p:sp>
+        <p:nvSpPr>
+          <p:cNvPr id="93" name="Textfeld 92">
+            <a:extLst>
+              <a:ext uri="{FF2B5EF4-FFF2-40B4-BE49-F238E27FC236}">
+                <a16:creationId xmlns:a16="http://schemas.microsoft.com/office/drawing/2014/main" id="{5D3BCE61-C62C-7B93-5F02-6DEF975278A8}"/>
+              </a:ext>
+            </a:extLst>
+          </p:cNvPr>
+          <p:cNvSpPr txBox="1"/>
+          <p:nvPr/>
+        </p:nvSpPr>
+        <p:spPr>
+          <a:xfrm>
+            <a:off x="8897272" y="5855710"/>
+            <a:ext cx="669908" cy="246221"/>
+          </a:xfrm>
+          <a:prstGeom prst="rect">
+            <a:avLst/>
+          </a:prstGeom>
+          <a:noFill/>
+        </p:spPr>
+        <p:txBody>
+          <a:bodyPr wrap="square" rtlCol="0">
+            <a:spAutoFit/>
+          </a:bodyPr>
+          <a:lstStyle/>
+          <a:p>
+            <a:pPr algn="ctr"/>
+            <a:r>
+              <a:rPr lang="de-DE" sz="1000" dirty="0"/>
+              <a:t>FIN</a:t>
+            </a:r>
+          </a:p>
+        </p:txBody>
+      </p:sp>
+      <p:sp>
+        <p:nvSpPr>
+          <p:cNvPr id="94" name="Textfeld 93">
+            <a:extLst>
+              <a:ext uri="{FF2B5EF4-FFF2-40B4-BE49-F238E27FC236}">
+                <a16:creationId xmlns:a16="http://schemas.microsoft.com/office/drawing/2014/main" id="{2F80FB40-10EA-972C-12EB-296063FC2242}"/>
+              </a:ext>
+            </a:extLst>
+          </p:cNvPr>
+          <p:cNvSpPr txBox="1"/>
+          <p:nvPr/>
+        </p:nvSpPr>
+        <p:spPr>
+          <a:xfrm>
+            <a:off x="10520370" y="6047209"/>
+            <a:ext cx="669908" cy="246221"/>
+          </a:xfrm>
+          <a:prstGeom prst="rect">
+            <a:avLst/>
+          </a:prstGeom>
+          <a:noFill/>
+        </p:spPr>
+        <p:txBody>
+          <a:bodyPr wrap="square" rtlCol="0">
+            <a:spAutoFit/>
+          </a:bodyPr>
+          <a:lstStyle/>
+          <a:p>
+            <a:r>
+              <a:rPr lang="de-DE" sz="1000" dirty="0"/>
+              <a:t>Idle</a:t>
+            </a:r>
+          </a:p>
+        </p:txBody>
+      </p:sp>
+      <p:sp>
+        <p:nvSpPr>
+          <p:cNvPr id="95" name="Textfeld 94">
+            <a:extLst>
+              <a:ext uri="{FF2B5EF4-FFF2-40B4-BE49-F238E27FC236}">
+                <a16:creationId xmlns:a16="http://schemas.microsoft.com/office/drawing/2014/main" id="{AB98A255-036B-C3E9-3CB5-4E92D9FF53F0}"/>
+              </a:ext>
+            </a:extLst>
+          </p:cNvPr>
+          <p:cNvSpPr txBox="1"/>
+          <p:nvPr/>
+        </p:nvSpPr>
+        <p:spPr>
+          <a:xfrm>
+            <a:off x="7179631" y="6210036"/>
+            <a:ext cx="669908" cy="246221"/>
+          </a:xfrm>
+          <a:prstGeom prst="rect">
+            <a:avLst/>
+          </a:prstGeom>
+          <a:noFill/>
+        </p:spPr>
+        <p:txBody>
+          <a:bodyPr wrap="square" rtlCol="0">
+            <a:spAutoFit/>
+          </a:bodyPr>
+          <a:lstStyle/>
+          <a:p>
+            <a:pPr algn="r"/>
+            <a:r>
+              <a:rPr lang="de-DE" sz="1000" dirty="0"/>
+              <a:t>Idle</a:t>
+            </a:r>
+          </a:p>
+        </p:txBody>
+      </p:sp>
+      <p:cxnSp>
+        <p:nvCxnSpPr>
+          <p:cNvPr id="96" name="Gerade Verbindung mit Pfeil 95">
+            <a:extLst>
+              <a:ext uri="{FF2B5EF4-FFF2-40B4-BE49-F238E27FC236}">
+                <a16:creationId xmlns:a16="http://schemas.microsoft.com/office/drawing/2014/main" id="{563C7498-4B27-738D-EF0B-B1025E49BD93}"/>
+              </a:ext>
+            </a:extLst>
+          </p:cNvPr>
+          <p:cNvCxnSpPr/>
+          <p:nvPr/>
+        </p:nvCxnSpPr>
+        <p:spPr>
+          <a:xfrm>
+            <a:off x="10550524" y="5904402"/>
+            <a:ext cx="1156392" cy="74418"/>
+          </a:xfrm>
+          <a:prstGeom prst="straightConnector1">
+            <a:avLst/>
+          </a:prstGeom>
+          <a:ln>
+            <a:solidFill>
+              <a:schemeClr val="tx1"/>
+            </a:solidFill>
+            <a:tailEnd type="triangle"/>
+          </a:ln>
+        </p:spPr>
+        <p:style>
+          <a:lnRef idx="2">
+            <a:schemeClr val="accent1"/>
+          </a:lnRef>
+          <a:fillRef idx="0">
+            <a:schemeClr val="accent1"/>
+          </a:fillRef>
+          <a:effectRef idx="1">
+            <a:schemeClr val="accent1"/>
+          </a:effectRef>
+          <a:fontRef idx="minor">
+            <a:schemeClr val="tx1"/>
+          </a:fontRef>
+        </p:style>
+      </p:cxnSp>
+      <p:sp>
+        <p:nvSpPr>
+          <p:cNvPr id="98" name="Textfeld 97">
+            <a:extLst>
+              <a:ext uri="{FF2B5EF4-FFF2-40B4-BE49-F238E27FC236}">
+                <a16:creationId xmlns:a16="http://schemas.microsoft.com/office/drawing/2014/main" id="{621A68D4-C616-8AB3-1610-F2929330B64A}"/>
+              </a:ext>
+            </a:extLst>
+          </p:cNvPr>
+          <p:cNvSpPr txBox="1"/>
+          <p:nvPr/>
+        </p:nvSpPr>
+        <p:spPr>
+          <a:xfrm>
+            <a:off x="7445536" y="3591781"/>
+            <a:ext cx="912260" cy="246221"/>
+          </a:xfrm>
+          <a:prstGeom prst="rect">
+            <a:avLst/>
+          </a:prstGeom>
+          <a:noFill/>
+        </p:spPr>
+        <p:txBody>
+          <a:bodyPr wrap="square" rtlCol="0">
+            <a:spAutoFit/>
+          </a:bodyPr>
+          <a:lstStyle/>
+          <a:p>
+            <a:pPr algn="ctr"/>
+            <a:r>
+              <a:rPr lang="de-DE" sz="1000" dirty="0"/>
+              <a:t>TIMEOUT</a:t>
+            </a:r>
+          </a:p>
+        </p:txBody>
+      </p:sp>
+    </p:spTree>
+    <p:extLst>
+      <p:ext uri="{BB962C8B-B14F-4D97-AF65-F5344CB8AC3E}">
+        <p14:creationId xmlns:p14="http://schemas.microsoft.com/office/powerpoint/2010/main" val="2508455981"/>
       </p:ext>
     </p:extLst>
   </p:cSld>

--- a/Docs.pptx
+++ b/Docs.pptx
@@ -6,9 +6,10 @@
   </p:sldMasterIdLst>
   <p:sldIdLst>
     <p:sldId id="256" r:id="rId2"/>
-    <p:sldId id="257" r:id="rId3"/>
-    <p:sldId id="258" r:id="rId4"/>
-    <p:sldId id="259" r:id="rId5"/>
+    <p:sldId id="260" r:id="rId3"/>
+    <p:sldId id="257" r:id="rId4"/>
+    <p:sldId id="258" r:id="rId5"/>
+    <p:sldId id="259" r:id="rId6"/>
   </p:sldIdLst>
   <p:sldSz cx="12192000" cy="6858000"/>
   <p:notesSz cx="6858000" cy="9144000"/>
@@ -262,7 +263,7 @@
           <a:p>
             <a:fld id="{191EFF39-64BE-4380-8A53-06CF69B4C7AB}" type="datetimeFigureOut">
               <a:rPr lang="de-DE" smtClean="0"/>
-              <a:t>15.07.2026</a:t>
+              <a:t>16.07.2026</a:t>
             </a:fld>
             <a:endParaRPr lang="de-DE"/>
           </a:p>
@@ -460,7 +461,7 @@
           <a:p>
             <a:fld id="{191EFF39-64BE-4380-8A53-06CF69B4C7AB}" type="datetimeFigureOut">
               <a:rPr lang="de-DE" smtClean="0"/>
-              <a:t>15.07.2026</a:t>
+              <a:t>16.07.2026</a:t>
             </a:fld>
             <a:endParaRPr lang="de-DE"/>
           </a:p>
@@ -668,7 +669,7 @@
           <a:p>
             <a:fld id="{191EFF39-64BE-4380-8A53-06CF69B4C7AB}" type="datetimeFigureOut">
               <a:rPr lang="de-DE" smtClean="0"/>
-              <a:t>15.07.2026</a:t>
+              <a:t>16.07.2026</a:t>
             </a:fld>
             <a:endParaRPr lang="de-DE"/>
           </a:p>
@@ -866,7 +867,7 @@
           <a:p>
             <a:fld id="{191EFF39-64BE-4380-8A53-06CF69B4C7AB}" type="datetimeFigureOut">
               <a:rPr lang="de-DE" smtClean="0"/>
-              <a:t>15.07.2026</a:t>
+              <a:t>16.07.2026</a:t>
             </a:fld>
             <a:endParaRPr lang="de-DE"/>
           </a:p>
@@ -1141,7 +1142,7 @@
           <a:p>
             <a:fld id="{191EFF39-64BE-4380-8A53-06CF69B4C7AB}" type="datetimeFigureOut">
               <a:rPr lang="de-DE" smtClean="0"/>
-              <a:t>15.07.2026</a:t>
+              <a:t>16.07.2026</a:t>
             </a:fld>
             <a:endParaRPr lang="de-DE"/>
           </a:p>
@@ -1406,7 +1407,7 @@
           <a:p>
             <a:fld id="{191EFF39-64BE-4380-8A53-06CF69B4C7AB}" type="datetimeFigureOut">
               <a:rPr lang="de-DE" smtClean="0"/>
-              <a:t>15.07.2026</a:t>
+              <a:t>16.07.2026</a:t>
             </a:fld>
             <a:endParaRPr lang="de-DE"/>
           </a:p>
@@ -1818,7 +1819,7 @@
           <a:p>
             <a:fld id="{191EFF39-64BE-4380-8A53-06CF69B4C7AB}" type="datetimeFigureOut">
               <a:rPr lang="de-DE" smtClean="0"/>
-              <a:t>15.07.2026</a:t>
+              <a:t>16.07.2026</a:t>
             </a:fld>
             <a:endParaRPr lang="de-DE"/>
           </a:p>
@@ -1959,7 +1960,7 @@
           <a:p>
             <a:fld id="{191EFF39-64BE-4380-8A53-06CF69B4C7AB}" type="datetimeFigureOut">
               <a:rPr lang="de-DE" smtClean="0"/>
-              <a:t>15.07.2026</a:t>
+              <a:t>16.07.2026</a:t>
             </a:fld>
             <a:endParaRPr lang="de-DE"/>
           </a:p>
@@ -2072,7 +2073,7 @@
           <a:p>
             <a:fld id="{191EFF39-64BE-4380-8A53-06CF69B4C7AB}" type="datetimeFigureOut">
               <a:rPr lang="de-DE" smtClean="0"/>
-              <a:t>15.07.2026</a:t>
+              <a:t>16.07.2026</a:t>
             </a:fld>
             <a:endParaRPr lang="de-DE"/>
           </a:p>
@@ -2383,7 +2384,7 @@
           <a:p>
             <a:fld id="{191EFF39-64BE-4380-8A53-06CF69B4C7AB}" type="datetimeFigureOut">
               <a:rPr lang="de-DE" smtClean="0"/>
-              <a:t>15.07.2026</a:t>
+              <a:t>16.07.2026</a:t>
             </a:fld>
             <a:endParaRPr lang="de-DE"/>
           </a:p>
@@ -2671,7 +2672,7 @@
           <a:p>
             <a:fld id="{191EFF39-64BE-4380-8A53-06CF69B4C7AB}" type="datetimeFigureOut">
               <a:rPr lang="de-DE" smtClean="0"/>
-              <a:t>15.07.2026</a:t>
+              <a:t>16.07.2026</a:t>
             </a:fld>
             <a:endParaRPr lang="de-DE"/>
           </a:p>
@@ -2912,7 +2913,7 @@
           <a:p>
             <a:fld id="{191EFF39-64BE-4380-8A53-06CF69B4C7AB}" type="datetimeFigureOut">
               <a:rPr lang="de-DE" smtClean="0"/>
-              <a:t>15.07.2026</a:t>
+              <a:t>16.07.2026</a:t>
             </a:fld>
             <a:endParaRPr lang="de-DE"/>
           </a:p>
@@ -4682,6 +4683,991 @@
         <p:cNvPr id="1" name="">
           <a:extLst>
             <a:ext uri="{FF2B5EF4-FFF2-40B4-BE49-F238E27FC236}">
+              <a16:creationId xmlns:a16="http://schemas.microsoft.com/office/drawing/2014/main" id="{34D7686D-21C2-CB72-00C0-CC346F91AE87}"/>
+            </a:ext>
+          </a:extLst>
+        </p:cNvPr>
+        <p:cNvGrpSpPr/>
+        <p:nvPr/>
+      </p:nvGrpSpPr>
+      <p:grpSpPr>
+        <a:xfrm>
+          <a:off x="0" y="0"/>
+          <a:ext cx="0" cy="0"/>
+          <a:chOff x="0" y="0"/>
+          <a:chExt cx="0" cy="0"/>
+        </a:xfrm>
+      </p:grpSpPr>
+      <p:sp>
+        <p:nvSpPr>
+          <p:cNvPr id="4" name="Rechteck 3">
+            <a:extLst>
+              <a:ext uri="{FF2B5EF4-FFF2-40B4-BE49-F238E27FC236}">
+                <a16:creationId xmlns:a16="http://schemas.microsoft.com/office/drawing/2014/main" id="{B07CA7E1-9A60-C36D-1A5D-C55A8448B106}"/>
+              </a:ext>
+            </a:extLst>
+          </p:cNvPr>
+          <p:cNvSpPr/>
+          <p:nvPr/>
+        </p:nvSpPr>
+        <p:spPr>
+          <a:xfrm>
+            <a:off x="1392011" y="2106386"/>
+            <a:ext cx="145143" cy="5667828"/>
+          </a:xfrm>
+          <a:prstGeom prst="rect">
+            <a:avLst/>
+          </a:prstGeom>
+          <a:solidFill>
+            <a:srgbClr val="00B0F0"/>
+          </a:solidFill>
+          <a:ln>
+            <a:solidFill>
+              <a:srgbClr val="00B0F0"/>
+            </a:solidFill>
+          </a:ln>
+        </p:spPr>
+        <p:style>
+          <a:lnRef idx="2">
+            <a:schemeClr val="accent1">
+              <a:shade val="15000"/>
+            </a:schemeClr>
+          </a:lnRef>
+          <a:fillRef idx="1">
+            <a:schemeClr val="accent1"/>
+          </a:fillRef>
+          <a:effectRef idx="0">
+            <a:schemeClr val="accent1"/>
+          </a:effectRef>
+          <a:fontRef idx="minor">
+            <a:schemeClr val="lt1"/>
+          </a:fontRef>
+        </p:style>
+        <p:txBody>
+          <a:bodyPr rtlCol="0" anchor="ctr"/>
+          <a:lstStyle/>
+          <a:p>
+            <a:pPr algn="ctr"/>
+            <a:endParaRPr lang="de-DE"/>
+          </a:p>
+        </p:txBody>
+      </p:sp>
+      <p:sp>
+        <p:nvSpPr>
+          <p:cNvPr id="8" name="Rechteck 7">
+            <a:extLst>
+              <a:ext uri="{FF2B5EF4-FFF2-40B4-BE49-F238E27FC236}">
+                <a16:creationId xmlns:a16="http://schemas.microsoft.com/office/drawing/2014/main" id="{626B3882-8FB2-D6E3-CE8D-038C8711F5D1}"/>
+              </a:ext>
+            </a:extLst>
+          </p:cNvPr>
+          <p:cNvSpPr/>
+          <p:nvPr/>
+        </p:nvSpPr>
+        <p:spPr>
+          <a:xfrm>
+            <a:off x="3968297" y="2106386"/>
+            <a:ext cx="145143" cy="5667828"/>
+          </a:xfrm>
+          <a:prstGeom prst="rect">
+            <a:avLst/>
+          </a:prstGeom>
+          <a:solidFill>
+            <a:srgbClr val="00B0F0"/>
+          </a:solidFill>
+          <a:ln>
+            <a:solidFill>
+              <a:srgbClr val="00B0F0"/>
+            </a:solidFill>
+          </a:ln>
+        </p:spPr>
+        <p:style>
+          <a:lnRef idx="2">
+            <a:schemeClr val="accent1">
+              <a:shade val="15000"/>
+            </a:schemeClr>
+          </a:lnRef>
+          <a:fillRef idx="1">
+            <a:schemeClr val="accent1"/>
+          </a:fillRef>
+          <a:effectRef idx="0">
+            <a:schemeClr val="accent1"/>
+          </a:effectRef>
+          <a:fontRef idx="minor">
+            <a:schemeClr val="lt1"/>
+          </a:fontRef>
+        </p:style>
+        <p:txBody>
+          <a:bodyPr rtlCol="0" anchor="ctr"/>
+          <a:lstStyle/>
+          <a:p>
+            <a:pPr algn="ctr"/>
+            <a:endParaRPr lang="de-DE"/>
+          </a:p>
+        </p:txBody>
+      </p:sp>
+      <p:sp>
+        <p:nvSpPr>
+          <p:cNvPr id="11" name="Textfeld 10">
+            <a:extLst>
+              <a:ext uri="{FF2B5EF4-FFF2-40B4-BE49-F238E27FC236}">
+                <a16:creationId xmlns:a16="http://schemas.microsoft.com/office/drawing/2014/main" id="{A0CF948D-A423-C316-BA44-3644290D4944}"/>
+              </a:ext>
+            </a:extLst>
+          </p:cNvPr>
+          <p:cNvSpPr txBox="1"/>
+          <p:nvPr/>
+        </p:nvSpPr>
+        <p:spPr>
+          <a:xfrm>
+            <a:off x="1841954" y="1155700"/>
+            <a:ext cx="1821543" cy="1200329"/>
+          </a:xfrm>
+          <a:prstGeom prst="rect">
+            <a:avLst/>
+          </a:prstGeom>
+          <a:noFill/>
+        </p:spPr>
+        <p:txBody>
+          <a:bodyPr wrap="square" rtlCol="0">
+            <a:spAutoFit/>
+          </a:bodyPr>
+          <a:lstStyle/>
+          <a:p>
+            <a:pPr algn="ctr"/>
+            <a:r>
+              <a:rPr lang="de-DE" dirty="0"/>
+              <a:t>A</a:t>
+            </a:r>
+          </a:p>
+          <a:p>
+            <a:pPr algn="ctr"/>
+            <a:endParaRPr lang="de-DE" dirty="0"/>
+          </a:p>
+          <a:p>
+            <a:pPr algn="ctr"/>
+            <a:endParaRPr lang="de-DE" dirty="0"/>
+          </a:p>
+          <a:p>
+            <a:pPr algn="ctr"/>
+            <a:endParaRPr lang="de-DE" dirty="0"/>
+          </a:p>
+        </p:txBody>
+      </p:sp>
+      <p:sp>
+        <p:nvSpPr>
+          <p:cNvPr id="13" name="Rechteck 12">
+            <a:extLst>
+              <a:ext uri="{FF2B5EF4-FFF2-40B4-BE49-F238E27FC236}">
+                <a16:creationId xmlns:a16="http://schemas.microsoft.com/office/drawing/2014/main" id="{D46CE05A-CCA7-BAF1-9210-2FF87BA44C48}"/>
+              </a:ext>
+            </a:extLst>
+          </p:cNvPr>
+          <p:cNvSpPr/>
+          <p:nvPr/>
+        </p:nvSpPr>
+        <p:spPr>
+          <a:xfrm>
+            <a:off x="7829096" y="2141890"/>
+            <a:ext cx="145143" cy="5667828"/>
+          </a:xfrm>
+          <a:prstGeom prst="rect">
+            <a:avLst/>
+          </a:prstGeom>
+          <a:solidFill>
+            <a:srgbClr val="00B0F0"/>
+          </a:solidFill>
+          <a:ln>
+            <a:solidFill>
+              <a:srgbClr val="00B0F0"/>
+            </a:solidFill>
+          </a:ln>
+        </p:spPr>
+        <p:style>
+          <a:lnRef idx="2">
+            <a:schemeClr val="accent1">
+              <a:shade val="15000"/>
+            </a:schemeClr>
+          </a:lnRef>
+          <a:fillRef idx="1">
+            <a:schemeClr val="accent1"/>
+          </a:fillRef>
+          <a:effectRef idx="0">
+            <a:schemeClr val="accent1"/>
+          </a:effectRef>
+          <a:fontRef idx="minor">
+            <a:schemeClr val="lt1"/>
+          </a:fontRef>
+        </p:style>
+        <p:txBody>
+          <a:bodyPr rtlCol="0" anchor="ctr"/>
+          <a:lstStyle/>
+          <a:p>
+            <a:pPr algn="ctr"/>
+            <a:endParaRPr lang="de-DE"/>
+          </a:p>
+        </p:txBody>
+      </p:sp>
+      <p:sp>
+        <p:nvSpPr>
+          <p:cNvPr id="15" name="Rechteck 14">
+            <a:extLst>
+              <a:ext uri="{FF2B5EF4-FFF2-40B4-BE49-F238E27FC236}">
+                <a16:creationId xmlns:a16="http://schemas.microsoft.com/office/drawing/2014/main" id="{6AB7A9BD-C99A-3A34-E23E-4EF3EEFF3DF9}"/>
+              </a:ext>
+            </a:extLst>
+          </p:cNvPr>
+          <p:cNvSpPr/>
+          <p:nvPr/>
+        </p:nvSpPr>
+        <p:spPr>
+          <a:xfrm>
+            <a:off x="10405382" y="2141890"/>
+            <a:ext cx="145143" cy="5667828"/>
+          </a:xfrm>
+          <a:prstGeom prst="rect">
+            <a:avLst/>
+          </a:prstGeom>
+          <a:solidFill>
+            <a:srgbClr val="00B0F0"/>
+          </a:solidFill>
+          <a:ln>
+            <a:solidFill>
+              <a:srgbClr val="00B0F0"/>
+            </a:solidFill>
+          </a:ln>
+        </p:spPr>
+        <p:style>
+          <a:lnRef idx="2">
+            <a:schemeClr val="accent1">
+              <a:shade val="15000"/>
+            </a:schemeClr>
+          </a:lnRef>
+          <a:fillRef idx="1">
+            <a:schemeClr val="accent1"/>
+          </a:fillRef>
+          <a:effectRef idx="0">
+            <a:schemeClr val="accent1"/>
+          </a:effectRef>
+          <a:fontRef idx="minor">
+            <a:schemeClr val="lt1"/>
+          </a:fontRef>
+        </p:style>
+        <p:txBody>
+          <a:bodyPr rtlCol="0" anchor="ctr"/>
+          <a:lstStyle/>
+          <a:p>
+            <a:pPr algn="ctr"/>
+            <a:endParaRPr lang="de-DE"/>
+          </a:p>
+        </p:txBody>
+      </p:sp>
+      <p:sp>
+        <p:nvSpPr>
+          <p:cNvPr id="17" name="Textfeld 16">
+            <a:extLst>
+              <a:ext uri="{FF2B5EF4-FFF2-40B4-BE49-F238E27FC236}">
+                <a16:creationId xmlns:a16="http://schemas.microsoft.com/office/drawing/2014/main" id="{A99B731F-2A8A-96BA-5548-6FC02D7C23B1}"/>
+              </a:ext>
+            </a:extLst>
+          </p:cNvPr>
+          <p:cNvSpPr txBox="1"/>
+          <p:nvPr/>
+        </p:nvSpPr>
+        <p:spPr>
+          <a:xfrm>
+            <a:off x="8133896" y="1155700"/>
+            <a:ext cx="1821543" cy="1477328"/>
+          </a:xfrm>
+          <a:prstGeom prst="rect">
+            <a:avLst/>
+          </a:prstGeom>
+          <a:noFill/>
+        </p:spPr>
+        <p:txBody>
+          <a:bodyPr wrap="square" rtlCol="0">
+            <a:spAutoFit/>
+          </a:bodyPr>
+          <a:lstStyle/>
+          <a:p>
+            <a:pPr algn="ctr"/>
+            <a:r>
+              <a:rPr lang="de-DE" dirty="0"/>
+              <a:t>B</a:t>
+            </a:r>
+          </a:p>
+          <a:p>
+            <a:pPr algn="ctr"/>
+            <a:endParaRPr lang="de-DE" dirty="0"/>
+          </a:p>
+          <a:p>
+            <a:pPr algn="ctr"/>
+            <a:endParaRPr lang="de-DE" dirty="0"/>
+          </a:p>
+          <a:p>
+            <a:pPr algn="ctr"/>
+            <a:endParaRPr lang="de-DE" dirty="0"/>
+          </a:p>
+          <a:p>
+            <a:pPr algn="ctr"/>
+            <a:endParaRPr lang="de-DE" dirty="0"/>
+          </a:p>
+        </p:txBody>
+      </p:sp>
+      <p:sp>
+        <p:nvSpPr>
+          <p:cNvPr id="18" name="Textfeld 17">
+            <a:extLst>
+              <a:ext uri="{FF2B5EF4-FFF2-40B4-BE49-F238E27FC236}">
+                <a16:creationId xmlns:a16="http://schemas.microsoft.com/office/drawing/2014/main" id="{FF1FF4BA-7F2E-661C-69FF-E995594BC885}"/>
+              </a:ext>
+            </a:extLst>
+          </p:cNvPr>
+          <p:cNvSpPr txBox="1"/>
+          <p:nvPr/>
+        </p:nvSpPr>
+        <p:spPr>
+          <a:xfrm>
+            <a:off x="680810" y="1634671"/>
+            <a:ext cx="1567543" cy="369332"/>
+          </a:xfrm>
+          <a:prstGeom prst="rect">
+            <a:avLst/>
+          </a:prstGeom>
+          <a:noFill/>
+        </p:spPr>
+        <p:txBody>
+          <a:bodyPr wrap="square" rtlCol="0">
+            <a:spAutoFit/>
+          </a:bodyPr>
+          <a:lstStyle/>
+          <a:p>
+            <a:pPr algn="ctr"/>
+            <a:r>
+              <a:rPr lang="de-DE" dirty="0"/>
+              <a:t>Main </a:t>
+            </a:r>
+            <a:r>
+              <a:rPr lang="de-DE" dirty="0" err="1"/>
+              <a:t>Activity</a:t>
+            </a:r>
+            <a:endParaRPr lang="de-DE" dirty="0"/>
+          </a:p>
+        </p:txBody>
+      </p:sp>
+      <p:sp>
+        <p:nvSpPr>
+          <p:cNvPr id="20" name="Textfeld 19">
+            <a:extLst>
+              <a:ext uri="{FF2B5EF4-FFF2-40B4-BE49-F238E27FC236}">
+                <a16:creationId xmlns:a16="http://schemas.microsoft.com/office/drawing/2014/main" id="{3CFA931B-FF88-5520-94DA-0A92E827EAD9}"/>
+              </a:ext>
+            </a:extLst>
+          </p:cNvPr>
+          <p:cNvSpPr txBox="1"/>
+          <p:nvPr/>
+        </p:nvSpPr>
+        <p:spPr>
+          <a:xfrm>
+            <a:off x="9694181" y="1634671"/>
+            <a:ext cx="1567543" cy="369332"/>
+          </a:xfrm>
+          <a:prstGeom prst="rect">
+            <a:avLst/>
+          </a:prstGeom>
+          <a:noFill/>
+        </p:spPr>
+        <p:txBody>
+          <a:bodyPr wrap="square" rtlCol="0">
+            <a:spAutoFit/>
+          </a:bodyPr>
+          <a:lstStyle/>
+          <a:p>
+            <a:pPr algn="ctr"/>
+            <a:r>
+              <a:rPr lang="de-DE" dirty="0"/>
+              <a:t>Main </a:t>
+            </a:r>
+            <a:r>
+              <a:rPr lang="de-DE" dirty="0" err="1"/>
+              <a:t>Activity</a:t>
+            </a:r>
+            <a:endParaRPr lang="de-DE" dirty="0"/>
+          </a:p>
+        </p:txBody>
+      </p:sp>
+      <p:sp>
+        <p:nvSpPr>
+          <p:cNvPr id="22" name="Textfeld 21">
+            <a:extLst>
+              <a:ext uri="{FF2B5EF4-FFF2-40B4-BE49-F238E27FC236}">
+                <a16:creationId xmlns:a16="http://schemas.microsoft.com/office/drawing/2014/main" id="{F6DAE256-A948-AE25-3CB3-1A77AE5D960E}"/>
+              </a:ext>
+            </a:extLst>
+          </p:cNvPr>
+          <p:cNvSpPr txBox="1"/>
+          <p:nvPr/>
+        </p:nvSpPr>
+        <p:spPr>
+          <a:xfrm>
+            <a:off x="3130096" y="1634671"/>
+            <a:ext cx="1821543" cy="369332"/>
+          </a:xfrm>
+          <a:prstGeom prst="rect">
+            <a:avLst/>
+          </a:prstGeom>
+          <a:noFill/>
+        </p:spPr>
+        <p:txBody>
+          <a:bodyPr wrap="square" rtlCol="0">
+            <a:spAutoFit/>
+          </a:bodyPr>
+          <a:lstStyle/>
+          <a:p>
+            <a:pPr algn="ctr"/>
+            <a:r>
+              <a:rPr lang="de-DE" dirty="0"/>
+              <a:t>OOB Connector</a:t>
+            </a:r>
+          </a:p>
+        </p:txBody>
+      </p:sp>
+      <p:sp>
+        <p:nvSpPr>
+          <p:cNvPr id="24" name="Textfeld 23">
+            <a:extLst>
+              <a:ext uri="{FF2B5EF4-FFF2-40B4-BE49-F238E27FC236}">
+                <a16:creationId xmlns:a16="http://schemas.microsoft.com/office/drawing/2014/main" id="{344C214F-0055-70CD-7549-CC09F128C351}"/>
+              </a:ext>
+            </a:extLst>
+          </p:cNvPr>
+          <p:cNvSpPr txBox="1"/>
+          <p:nvPr/>
+        </p:nvSpPr>
+        <p:spPr>
+          <a:xfrm>
+            <a:off x="6990895" y="1709698"/>
+            <a:ext cx="1821543" cy="369332"/>
+          </a:xfrm>
+          <a:prstGeom prst="rect">
+            <a:avLst/>
+          </a:prstGeom>
+          <a:noFill/>
+        </p:spPr>
+        <p:txBody>
+          <a:bodyPr wrap="square" rtlCol="0">
+            <a:spAutoFit/>
+          </a:bodyPr>
+          <a:lstStyle/>
+          <a:p>
+            <a:pPr algn="ctr"/>
+            <a:r>
+              <a:rPr lang="de-DE" dirty="0"/>
+              <a:t>OOB Connector</a:t>
+            </a:r>
+          </a:p>
+        </p:txBody>
+      </p:sp>
+      <p:sp>
+        <p:nvSpPr>
+          <p:cNvPr id="27" name="Textfeld 26">
+            <a:extLst>
+              <a:ext uri="{FF2B5EF4-FFF2-40B4-BE49-F238E27FC236}">
+                <a16:creationId xmlns:a16="http://schemas.microsoft.com/office/drawing/2014/main" id="{78545669-2938-BDAA-6D34-6C11D23F4FA1}"/>
+              </a:ext>
+            </a:extLst>
+          </p:cNvPr>
+          <p:cNvSpPr txBox="1"/>
+          <p:nvPr/>
+        </p:nvSpPr>
+        <p:spPr>
+          <a:xfrm>
+            <a:off x="1651452" y="2620126"/>
+            <a:ext cx="2434773" cy="246221"/>
+          </a:xfrm>
+          <a:prstGeom prst="rect">
+            <a:avLst/>
+          </a:prstGeom>
+          <a:noFill/>
+        </p:spPr>
+        <p:txBody>
+          <a:bodyPr wrap="square" rtlCol="0">
+            <a:spAutoFit/>
+          </a:bodyPr>
+          <a:lstStyle/>
+          <a:p>
+            <a:r>
+              <a:rPr lang="de-DE" sz="1000" dirty="0" err="1"/>
+              <a:t>oobConnector.stopMeasuring</a:t>
+            </a:r>
+            <a:r>
+              <a:rPr lang="de-DE" sz="1000" dirty="0"/>
+              <a:t>()</a:t>
+            </a:r>
+          </a:p>
+        </p:txBody>
+      </p:sp>
+      <p:cxnSp>
+        <p:nvCxnSpPr>
+          <p:cNvPr id="29" name="Gerade Verbindung mit Pfeil 28">
+            <a:extLst>
+              <a:ext uri="{FF2B5EF4-FFF2-40B4-BE49-F238E27FC236}">
+                <a16:creationId xmlns:a16="http://schemas.microsoft.com/office/drawing/2014/main" id="{AEA1C57B-D232-9C09-7BA2-56F523AB494F}"/>
+              </a:ext>
+            </a:extLst>
+          </p:cNvPr>
+          <p:cNvCxnSpPr/>
+          <p:nvPr/>
+        </p:nvCxnSpPr>
+        <p:spPr>
+          <a:xfrm>
+            <a:off x="1537154" y="2823847"/>
+            <a:ext cx="2431143" cy="130629"/>
+          </a:xfrm>
+          <a:prstGeom prst="straightConnector1">
+            <a:avLst/>
+          </a:prstGeom>
+          <a:ln>
+            <a:prstDash val="solid"/>
+            <a:tailEnd type="triangle"/>
+          </a:ln>
+        </p:spPr>
+        <p:style>
+          <a:lnRef idx="2">
+            <a:schemeClr val="accent1"/>
+          </a:lnRef>
+          <a:fillRef idx="0">
+            <a:schemeClr val="accent1"/>
+          </a:fillRef>
+          <a:effectRef idx="1">
+            <a:schemeClr val="accent1"/>
+          </a:effectRef>
+          <a:fontRef idx="minor">
+            <a:schemeClr val="tx1"/>
+          </a:fontRef>
+        </p:style>
+      </p:cxnSp>
+      <p:cxnSp>
+        <p:nvCxnSpPr>
+          <p:cNvPr id="31" name="Gerade Verbindung mit Pfeil 30">
+            <a:extLst>
+              <a:ext uri="{FF2B5EF4-FFF2-40B4-BE49-F238E27FC236}">
+                <a16:creationId xmlns:a16="http://schemas.microsoft.com/office/drawing/2014/main" id="{732E51A1-C6C3-1A39-5C16-83A0C79EE8C8}"/>
+              </a:ext>
+            </a:extLst>
+          </p:cNvPr>
+          <p:cNvCxnSpPr/>
+          <p:nvPr/>
+        </p:nvCxnSpPr>
+        <p:spPr>
+          <a:xfrm>
+            <a:off x="4113440" y="3059704"/>
+            <a:ext cx="3715656" cy="174671"/>
+          </a:xfrm>
+          <a:prstGeom prst="straightConnector1">
+            <a:avLst/>
+          </a:prstGeom>
+          <a:ln>
+            <a:prstDash val="solid"/>
+            <a:tailEnd type="triangle"/>
+          </a:ln>
+        </p:spPr>
+        <p:style>
+          <a:lnRef idx="2">
+            <a:schemeClr val="accent1"/>
+          </a:lnRef>
+          <a:fillRef idx="0">
+            <a:schemeClr val="accent1"/>
+          </a:fillRef>
+          <a:effectRef idx="1">
+            <a:schemeClr val="accent1"/>
+          </a:effectRef>
+          <a:fontRef idx="minor">
+            <a:schemeClr val="tx1"/>
+          </a:fontRef>
+        </p:style>
+      </p:cxnSp>
+      <p:cxnSp>
+        <p:nvCxnSpPr>
+          <p:cNvPr id="33" name="Gerade Verbindung mit Pfeil 32">
+            <a:extLst>
+              <a:ext uri="{FF2B5EF4-FFF2-40B4-BE49-F238E27FC236}">
+                <a16:creationId xmlns:a16="http://schemas.microsoft.com/office/drawing/2014/main" id="{630DD798-2353-F634-4452-A65F54846AA7}"/>
+              </a:ext>
+            </a:extLst>
+          </p:cNvPr>
+          <p:cNvCxnSpPr/>
+          <p:nvPr/>
+        </p:nvCxnSpPr>
+        <p:spPr>
+          <a:xfrm>
+            <a:off x="7974239" y="3234375"/>
+            <a:ext cx="2380343" cy="111986"/>
+          </a:xfrm>
+          <a:prstGeom prst="straightConnector1">
+            <a:avLst/>
+          </a:prstGeom>
+          <a:ln>
+            <a:prstDash val="solid"/>
+            <a:tailEnd type="triangle"/>
+          </a:ln>
+        </p:spPr>
+        <p:style>
+          <a:lnRef idx="2">
+            <a:schemeClr val="accent1"/>
+          </a:lnRef>
+          <a:fillRef idx="0">
+            <a:schemeClr val="accent1"/>
+          </a:fillRef>
+          <a:effectRef idx="1">
+            <a:schemeClr val="accent1"/>
+          </a:effectRef>
+          <a:fontRef idx="minor">
+            <a:schemeClr val="tx1"/>
+          </a:fontRef>
+        </p:style>
+      </p:cxnSp>
+      <p:sp>
+        <p:nvSpPr>
+          <p:cNvPr id="35" name="Textfeld 34">
+            <a:extLst>
+              <a:ext uri="{FF2B5EF4-FFF2-40B4-BE49-F238E27FC236}">
+                <a16:creationId xmlns:a16="http://schemas.microsoft.com/office/drawing/2014/main" id="{D7C4F106-F526-2629-B75C-EAF4383045E2}"/>
+              </a:ext>
+            </a:extLst>
+          </p:cNvPr>
+          <p:cNvSpPr txBox="1"/>
+          <p:nvPr/>
+        </p:nvSpPr>
+        <p:spPr>
+          <a:xfrm>
+            <a:off x="4681310" y="2838100"/>
+            <a:ext cx="2434773" cy="246221"/>
+          </a:xfrm>
+          <a:prstGeom prst="rect">
+            <a:avLst/>
+          </a:prstGeom>
+          <a:noFill/>
+        </p:spPr>
+        <p:txBody>
+          <a:bodyPr wrap="square" rtlCol="0">
+            <a:spAutoFit/>
+          </a:bodyPr>
+          <a:lstStyle/>
+          <a:p>
+            <a:pPr algn="ctr"/>
+            <a:r>
+              <a:rPr lang="de-DE" sz="1000" dirty="0"/>
+              <a:t>STOP_MEASUREMENT </a:t>
+            </a:r>
+            <a:r>
+              <a:rPr lang="de-DE" sz="1000" dirty="0" err="1"/>
+              <a:t>package</a:t>
+            </a:r>
+            <a:endParaRPr lang="de-DE" sz="1000" dirty="0"/>
+          </a:p>
+        </p:txBody>
+      </p:sp>
+      <p:sp>
+        <p:nvSpPr>
+          <p:cNvPr id="39" name="Textfeld 38">
+            <a:extLst>
+              <a:ext uri="{FF2B5EF4-FFF2-40B4-BE49-F238E27FC236}">
+                <a16:creationId xmlns:a16="http://schemas.microsoft.com/office/drawing/2014/main" id="{53855DCC-5505-6E1D-CB9D-1C0641A7C7BC}"/>
+              </a:ext>
+            </a:extLst>
+          </p:cNvPr>
+          <p:cNvSpPr txBox="1"/>
+          <p:nvPr/>
+        </p:nvSpPr>
+        <p:spPr>
+          <a:xfrm>
+            <a:off x="7945209" y="2851832"/>
+            <a:ext cx="2434773" cy="400110"/>
+          </a:xfrm>
+          <a:prstGeom prst="rect">
+            <a:avLst/>
+          </a:prstGeom>
+          <a:noFill/>
+        </p:spPr>
+        <p:txBody>
+          <a:bodyPr wrap="square" rtlCol="0">
+            <a:spAutoFit/>
+          </a:bodyPr>
+          <a:lstStyle/>
+          <a:p>
+            <a:pPr algn="ctr"/>
+            <a:r>
+              <a:rPr lang="de-DE" sz="1000" dirty="0" err="1"/>
+              <a:t>oobConnectionCallback</a:t>
+            </a:r>
+            <a:r>
+              <a:rPr lang="de-DE" sz="1000" dirty="0"/>
+              <a:t>. </a:t>
+            </a:r>
+            <a:r>
+              <a:rPr lang="de-DE" sz="1000" dirty="0" err="1"/>
+              <a:t>stopMeasuring</a:t>
+            </a:r>
+            <a:r>
+              <a:rPr lang="de-DE" sz="1000" dirty="0"/>
+              <a:t>()</a:t>
+            </a:r>
+          </a:p>
+        </p:txBody>
+      </p:sp>
+      <p:cxnSp>
+        <p:nvCxnSpPr>
+          <p:cNvPr id="41" name="Gerade Verbindung mit Pfeil 40">
+            <a:extLst>
+              <a:ext uri="{FF2B5EF4-FFF2-40B4-BE49-F238E27FC236}">
+                <a16:creationId xmlns:a16="http://schemas.microsoft.com/office/drawing/2014/main" id="{3167D842-05D0-5A14-EC91-E681B09103B2}"/>
+              </a:ext>
+            </a:extLst>
+          </p:cNvPr>
+          <p:cNvCxnSpPr/>
+          <p:nvPr/>
+        </p:nvCxnSpPr>
+        <p:spPr>
+          <a:xfrm>
+            <a:off x="405039" y="2241455"/>
+            <a:ext cx="986972" cy="0"/>
+          </a:xfrm>
+          <a:prstGeom prst="straightConnector1">
+            <a:avLst/>
+          </a:prstGeom>
+          <a:ln>
+            <a:prstDash val="solid"/>
+            <a:tailEnd type="triangle"/>
+          </a:ln>
+        </p:spPr>
+        <p:style>
+          <a:lnRef idx="2">
+            <a:schemeClr val="accent1"/>
+          </a:lnRef>
+          <a:fillRef idx="0">
+            <a:schemeClr val="accent1"/>
+          </a:fillRef>
+          <a:effectRef idx="1">
+            <a:schemeClr val="accent1"/>
+          </a:effectRef>
+          <a:fontRef idx="minor">
+            <a:schemeClr val="tx1"/>
+          </a:fontRef>
+        </p:style>
+      </p:cxnSp>
+      <p:sp>
+        <p:nvSpPr>
+          <p:cNvPr id="43" name="Textfeld 42">
+            <a:extLst>
+              <a:ext uri="{FF2B5EF4-FFF2-40B4-BE49-F238E27FC236}">
+                <a16:creationId xmlns:a16="http://schemas.microsoft.com/office/drawing/2014/main" id="{FDD47FC1-DFA8-4D53-61E2-945A30E9DB4C}"/>
+              </a:ext>
+            </a:extLst>
+          </p:cNvPr>
+          <p:cNvSpPr txBox="1"/>
+          <p:nvPr/>
+        </p:nvSpPr>
+        <p:spPr>
+          <a:xfrm>
+            <a:off x="638854" y="2370460"/>
+            <a:ext cx="1660077" cy="246221"/>
+          </a:xfrm>
+          <a:prstGeom prst="rect">
+            <a:avLst/>
+          </a:prstGeom>
+          <a:noFill/>
+        </p:spPr>
+        <p:txBody>
+          <a:bodyPr wrap="square" rtlCol="0">
+            <a:spAutoFit/>
+          </a:bodyPr>
+          <a:lstStyle/>
+          <a:p>
+            <a:pPr algn="ctr"/>
+            <a:r>
+              <a:rPr lang="de-DE" sz="1000" dirty="0" err="1"/>
+              <a:t>stopMeasuringBtn</a:t>
+            </a:r>
+            <a:r>
+              <a:rPr lang="de-DE" sz="1000" dirty="0"/>
+              <a:t>()</a:t>
+            </a:r>
+          </a:p>
+        </p:txBody>
+      </p:sp>
+      <p:sp>
+        <p:nvSpPr>
+          <p:cNvPr id="123" name="Textfeld 122">
+            <a:extLst>
+              <a:ext uri="{FF2B5EF4-FFF2-40B4-BE49-F238E27FC236}">
+                <a16:creationId xmlns:a16="http://schemas.microsoft.com/office/drawing/2014/main" id="{4D951A8A-D95C-F0A1-0851-04FC28DA4239}"/>
+              </a:ext>
+            </a:extLst>
+          </p:cNvPr>
+          <p:cNvSpPr txBox="1"/>
+          <p:nvPr/>
+        </p:nvSpPr>
+        <p:spPr>
+          <a:xfrm>
+            <a:off x="4572468" y="177655"/>
+            <a:ext cx="3047064" cy="646331"/>
+          </a:xfrm>
+          <a:prstGeom prst="rect">
+            <a:avLst/>
+          </a:prstGeom>
+          <a:noFill/>
+        </p:spPr>
+        <p:txBody>
+          <a:bodyPr wrap="square" rtlCol="0">
+            <a:spAutoFit/>
+          </a:bodyPr>
+          <a:lstStyle/>
+          <a:p>
+            <a:r>
+              <a:rPr lang="de-DE" dirty="0"/>
+              <a:t>Messung Beenden (symmetrisch)</a:t>
+            </a:r>
+          </a:p>
+        </p:txBody>
+      </p:sp>
+      <p:sp>
+        <p:nvSpPr>
+          <p:cNvPr id="124" name="Textfeld 123">
+            <a:extLst>
+              <a:ext uri="{FF2B5EF4-FFF2-40B4-BE49-F238E27FC236}">
+                <a16:creationId xmlns:a16="http://schemas.microsoft.com/office/drawing/2014/main" id="{71D5ABE1-8226-8B6C-0773-38C582C6AE3F}"/>
+              </a:ext>
+            </a:extLst>
+          </p:cNvPr>
+          <p:cNvSpPr txBox="1"/>
+          <p:nvPr/>
+        </p:nvSpPr>
+        <p:spPr>
+          <a:xfrm>
+            <a:off x="147320" y="1971308"/>
+            <a:ext cx="782956" cy="246221"/>
+          </a:xfrm>
+          <a:prstGeom prst="rect">
+            <a:avLst/>
+          </a:prstGeom>
+          <a:noFill/>
+        </p:spPr>
+        <p:txBody>
+          <a:bodyPr wrap="square" rtlCol="0">
+            <a:spAutoFit/>
+          </a:bodyPr>
+          <a:lstStyle/>
+          <a:p>
+            <a:pPr algn="ctr"/>
+            <a:r>
+              <a:rPr lang="de-DE" sz="1000" dirty="0"/>
+              <a:t>User</a:t>
+            </a:r>
+          </a:p>
+        </p:txBody>
+      </p:sp>
+      <p:sp>
+        <p:nvSpPr>
+          <p:cNvPr id="126" name="Textfeld 125">
+            <a:extLst>
+              <a:ext uri="{FF2B5EF4-FFF2-40B4-BE49-F238E27FC236}">
+                <a16:creationId xmlns:a16="http://schemas.microsoft.com/office/drawing/2014/main" id="{39E7F413-8E09-C6A4-E9CD-A1E09D3343A1}"/>
+              </a:ext>
+            </a:extLst>
+          </p:cNvPr>
+          <p:cNvSpPr txBox="1"/>
+          <p:nvPr/>
+        </p:nvSpPr>
+        <p:spPr>
+          <a:xfrm>
+            <a:off x="9643605" y="3482683"/>
+            <a:ext cx="1660077" cy="246221"/>
+          </a:xfrm>
+          <a:prstGeom prst="rect">
+            <a:avLst/>
+          </a:prstGeom>
+          <a:noFill/>
+        </p:spPr>
+        <p:txBody>
+          <a:bodyPr wrap="square" rtlCol="0">
+            <a:spAutoFit/>
+          </a:bodyPr>
+          <a:lstStyle/>
+          <a:p>
+            <a:pPr algn="ctr"/>
+            <a:r>
+              <a:rPr lang="de-DE" sz="1000" dirty="0" err="1"/>
+              <a:t>rangingSession.close</a:t>
+            </a:r>
+            <a:r>
+              <a:rPr lang="de-DE" sz="1000" dirty="0"/>
+              <a:t>()</a:t>
+            </a:r>
+          </a:p>
+        </p:txBody>
+      </p:sp>
+      <p:sp>
+        <p:nvSpPr>
+          <p:cNvPr id="3" name="Textfeld 2">
+            <a:extLst>
+              <a:ext uri="{FF2B5EF4-FFF2-40B4-BE49-F238E27FC236}">
+                <a16:creationId xmlns:a16="http://schemas.microsoft.com/office/drawing/2014/main" id="{1259E74B-D672-AB6D-CC93-9C5213DEF62E}"/>
+              </a:ext>
+            </a:extLst>
+          </p:cNvPr>
+          <p:cNvSpPr txBox="1"/>
+          <p:nvPr/>
+        </p:nvSpPr>
+        <p:spPr>
+          <a:xfrm>
+            <a:off x="634542" y="2936593"/>
+            <a:ext cx="1660077" cy="246221"/>
+          </a:xfrm>
+          <a:prstGeom prst="rect">
+            <a:avLst/>
+          </a:prstGeom>
+          <a:noFill/>
+        </p:spPr>
+        <p:txBody>
+          <a:bodyPr wrap="square" rtlCol="0">
+            <a:spAutoFit/>
+          </a:bodyPr>
+          <a:lstStyle/>
+          <a:p>
+            <a:pPr algn="ctr"/>
+            <a:r>
+              <a:rPr lang="de-DE" sz="1000" dirty="0" err="1"/>
+              <a:t>stopMeasuring</a:t>
+            </a:r>
+            <a:r>
+              <a:rPr lang="de-DE" sz="1000" dirty="0"/>
+              <a:t> ()</a:t>
+            </a:r>
+          </a:p>
+        </p:txBody>
+      </p:sp>
+    </p:spTree>
+    <p:extLst>
+      <p:ext uri="{BB962C8B-B14F-4D97-AF65-F5344CB8AC3E}">
+        <p14:creationId xmlns:p14="http://schemas.microsoft.com/office/powerpoint/2010/main" val="3979608008"/>
+      </p:ext>
+    </p:extLst>
+  </p:cSld>
+  <p:clrMapOvr>
+    <a:masterClrMapping/>
+  </p:clrMapOvr>
+</p:sld>
+</file>
+
+<file path=ppt/slides/slide3.xml><?xml version="1.0" encoding="utf-8"?>
+<p:sld xmlns:a="http://schemas.openxmlformats.org/drawingml/2006/main" xmlns:r="http://schemas.openxmlformats.org/officeDocument/2006/relationships" xmlns:p="http://schemas.openxmlformats.org/presentationml/2006/main">
+  <p:cSld>
+    <p:spTree>
+      <p:nvGrpSpPr>
+        <p:cNvPr id="1" name="">
+          <a:extLst>
+            <a:ext uri="{FF2B5EF4-FFF2-40B4-BE49-F238E27FC236}">
               <a16:creationId xmlns:a16="http://schemas.microsoft.com/office/drawing/2014/main" id="{3DA32387-A085-C88C-D486-645A3B1A80C8}"/>
             </a:ext>
           </a:extLst>
@@ -5568,7 +6554,7 @@
 </p:sld>
 </file>
 
-<file path=ppt/slides/slide3.xml><?xml version="1.0" encoding="utf-8"?>
+<file path=ppt/slides/slide4.xml><?xml version="1.0" encoding="utf-8"?>
 <p:sld xmlns:a="http://schemas.openxmlformats.org/drawingml/2006/main" xmlns:r="http://schemas.openxmlformats.org/officeDocument/2006/relationships" xmlns:p="http://schemas.openxmlformats.org/presentationml/2006/main">
   <p:cSld>
     <p:spTree>
@@ -6762,7 +7748,7 @@
 </p:sld>
 </file>
 
-<file path=ppt/slides/slide4.xml><?xml version="1.0" encoding="utf-8"?>
+<file path=ppt/slides/slide5.xml><?xml version="1.0" encoding="utf-8"?>
 <p:sld xmlns:a="http://schemas.openxmlformats.org/drawingml/2006/main" xmlns:r="http://schemas.openxmlformats.org/officeDocument/2006/relationships" xmlns:p="http://schemas.openxmlformats.org/presentationml/2006/main">
   <p:cSld>
     <p:spTree>

--- a/Docs.pptx
+++ b/Docs.pptx
@@ -263,7 +263,7 @@
           <a:p>
             <a:fld id="{191EFF39-64BE-4380-8A53-06CF69B4C7AB}" type="datetimeFigureOut">
               <a:rPr lang="de-DE" smtClean="0"/>
-              <a:t>16.07.2026</a:t>
+              <a:t>24.07.2026</a:t>
             </a:fld>
             <a:endParaRPr lang="de-DE"/>
           </a:p>
@@ -461,7 +461,7 @@
           <a:p>
             <a:fld id="{191EFF39-64BE-4380-8A53-06CF69B4C7AB}" type="datetimeFigureOut">
               <a:rPr lang="de-DE" smtClean="0"/>
-              <a:t>16.07.2026</a:t>
+              <a:t>24.07.2026</a:t>
             </a:fld>
             <a:endParaRPr lang="de-DE"/>
           </a:p>
@@ -669,7 +669,7 @@
           <a:p>
             <a:fld id="{191EFF39-64BE-4380-8A53-06CF69B4C7AB}" type="datetimeFigureOut">
               <a:rPr lang="de-DE" smtClean="0"/>
-              <a:t>16.07.2026</a:t>
+              <a:t>24.07.2026</a:t>
             </a:fld>
             <a:endParaRPr lang="de-DE"/>
           </a:p>
@@ -867,7 +867,7 @@
           <a:p>
             <a:fld id="{191EFF39-64BE-4380-8A53-06CF69B4C7AB}" type="datetimeFigureOut">
               <a:rPr lang="de-DE" smtClean="0"/>
-              <a:t>16.07.2026</a:t>
+              <a:t>24.07.2026</a:t>
             </a:fld>
             <a:endParaRPr lang="de-DE"/>
           </a:p>
@@ -1142,7 +1142,7 @@
           <a:p>
             <a:fld id="{191EFF39-64BE-4380-8A53-06CF69B4C7AB}" type="datetimeFigureOut">
               <a:rPr lang="de-DE" smtClean="0"/>
-              <a:t>16.07.2026</a:t>
+              <a:t>24.07.2026</a:t>
             </a:fld>
             <a:endParaRPr lang="de-DE"/>
           </a:p>
@@ -1407,7 +1407,7 @@
           <a:p>
             <a:fld id="{191EFF39-64BE-4380-8A53-06CF69B4C7AB}" type="datetimeFigureOut">
               <a:rPr lang="de-DE" smtClean="0"/>
-              <a:t>16.07.2026</a:t>
+              <a:t>24.07.2026</a:t>
             </a:fld>
             <a:endParaRPr lang="de-DE"/>
           </a:p>
@@ -1819,7 +1819,7 @@
           <a:p>
             <a:fld id="{191EFF39-64BE-4380-8A53-06CF69B4C7AB}" type="datetimeFigureOut">
               <a:rPr lang="de-DE" smtClean="0"/>
-              <a:t>16.07.2026</a:t>
+              <a:t>24.07.2026</a:t>
             </a:fld>
             <a:endParaRPr lang="de-DE"/>
           </a:p>
@@ -1960,7 +1960,7 @@
           <a:p>
             <a:fld id="{191EFF39-64BE-4380-8A53-06CF69B4C7AB}" type="datetimeFigureOut">
               <a:rPr lang="de-DE" smtClean="0"/>
-              <a:t>16.07.2026</a:t>
+              <a:t>24.07.2026</a:t>
             </a:fld>
             <a:endParaRPr lang="de-DE"/>
           </a:p>
@@ -2073,7 +2073,7 @@
           <a:p>
             <a:fld id="{191EFF39-64BE-4380-8A53-06CF69B4C7AB}" type="datetimeFigureOut">
               <a:rPr lang="de-DE" smtClean="0"/>
-              <a:t>16.07.2026</a:t>
+              <a:t>24.07.2026</a:t>
             </a:fld>
             <a:endParaRPr lang="de-DE"/>
           </a:p>
@@ -2384,7 +2384,7 @@
           <a:p>
             <a:fld id="{191EFF39-64BE-4380-8A53-06CF69B4C7AB}" type="datetimeFigureOut">
               <a:rPr lang="de-DE" smtClean="0"/>
-              <a:t>16.07.2026</a:t>
+              <a:t>24.07.2026</a:t>
             </a:fld>
             <a:endParaRPr lang="de-DE"/>
           </a:p>
@@ -2672,7 +2672,7 @@
           <a:p>
             <a:fld id="{191EFF39-64BE-4380-8A53-06CF69B4C7AB}" type="datetimeFigureOut">
               <a:rPr lang="de-DE" smtClean="0"/>
-              <a:t>16.07.2026</a:t>
+              <a:t>24.07.2026</a:t>
             </a:fld>
             <a:endParaRPr lang="de-DE"/>
           </a:p>
@@ -2913,7 +2913,7 @@
           <a:p>
             <a:fld id="{191EFF39-64BE-4380-8A53-06CF69B4C7AB}" type="datetimeFigureOut">
               <a:rPr lang="de-DE" smtClean="0"/>
-              <a:t>16.07.2026</a:t>
+              <a:t>24.07.2026</a:t>
             </a:fld>
             <a:endParaRPr lang="de-DE"/>
           </a:p>
@@ -3805,45 +3805,6 @@
           </a:p>
         </p:txBody>
       </p:sp>
-      <p:sp>
-        <p:nvSpPr>
-          <p:cNvPr id="27" name="Textfeld 26">
-            <a:extLst>
-              <a:ext uri="{FF2B5EF4-FFF2-40B4-BE49-F238E27FC236}">
-                <a16:creationId xmlns:a16="http://schemas.microsoft.com/office/drawing/2014/main" id="{9EE9F1B0-E4A4-B85A-12B5-5FA516CD84D9}"/>
-              </a:ext>
-            </a:extLst>
-          </p:cNvPr>
-          <p:cNvSpPr txBox="1"/>
-          <p:nvPr/>
-        </p:nvSpPr>
-        <p:spPr>
-          <a:xfrm>
-            <a:off x="1651452" y="2620126"/>
-            <a:ext cx="2434773" cy="246221"/>
-          </a:xfrm>
-          <a:prstGeom prst="rect">
-            <a:avLst/>
-          </a:prstGeom>
-          <a:noFill/>
-        </p:spPr>
-        <p:txBody>
-          <a:bodyPr wrap="square" rtlCol="0">
-            <a:spAutoFit/>
-          </a:bodyPr>
-          <a:lstStyle/>
-          <a:p>
-            <a:r>
-              <a:rPr lang="de-DE" sz="1000" dirty="0" err="1"/>
-              <a:t>oobConnector.requestMeasuring</a:t>
-            </a:r>
-            <a:r>
-              <a:rPr lang="de-DE" sz="1000" dirty="0"/>
-              <a:t>()</a:t>
-            </a:r>
-          </a:p>
-        </p:txBody>
-      </p:sp>
       <p:cxnSp>
         <p:nvCxnSpPr>
           <p:cNvPr id="29" name="Gerade Verbindung mit Pfeil 28">
@@ -4005,54 +3966,6 @@
           </a:p>
         </p:txBody>
       </p:sp>
-      <p:sp>
-        <p:nvSpPr>
-          <p:cNvPr id="39" name="Textfeld 38">
-            <a:extLst>
-              <a:ext uri="{FF2B5EF4-FFF2-40B4-BE49-F238E27FC236}">
-                <a16:creationId xmlns:a16="http://schemas.microsoft.com/office/drawing/2014/main" id="{72BD8BA9-904E-0F53-8F1C-0C74D75C76F3}"/>
-              </a:ext>
-            </a:extLst>
-          </p:cNvPr>
-          <p:cNvSpPr txBox="1"/>
-          <p:nvPr/>
-        </p:nvSpPr>
-        <p:spPr>
-          <a:xfrm>
-            <a:off x="7945209" y="2851832"/>
-            <a:ext cx="2434773" cy="400110"/>
-          </a:xfrm>
-          <a:prstGeom prst="rect">
-            <a:avLst/>
-          </a:prstGeom>
-          <a:noFill/>
-        </p:spPr>
-        <p:txBody>
-          <a:bodyPr wrap="square" rtlCol="0">
-            <a:spAutoFit/>
-          </a:bodyPr>
-          <a:lstStyle/>
-          <a:p>
-            <a:pPr algn="ctr"/>
-            <a:r>
-              <a:rPr lang="de-DE" sz="1000" dirty="0" err="1"/>
-              <a:t>oobConnectionCallback</a:t>
-            </a:r>
-            <a:r>
-              <a:rPr lang="de-DE" sz="1000" dirty="0"/>
-              <a:t>. </a:t>
-            </a:r>
-            <a:r>
-              <a:rPr lang="de-DE" sz="1000" dirty="0" err="1"/>
-              <a:t>requestMeasuring</a:t>
-            </a:r>
-            <a:r>
-              <a:rPr lang="de-DE" sz="1000" dirty="0"/>
-              <a:t>()</a:t>
-            </a:r>
-          </a:p>
-        </p:txBody>
-      </p:sp>
       <p:cxnSp>
         <p:nvCxnSpPr>
           <p:cNvPr id="41" name="Gerade Verbindung mit Pfeil 40">
@@ -4382,94 +4295,6 @@
           </a:fontRef>
         </p:style>
       </p:cxnSp>
-      <p:sp>
-        <p:nvSpPr>
-          <p:cNvPr id="62" name="Textfeld 61">
-            <a:extLst>
-              <a:ext uri="{FF2B5EF4-FFF2-40B4-BE49-F238E27FC236}">
-                <a16:creationId xmlns:a16="http://schemas.microsoft.com/office/drawing/2014/main" id="{E85983FE-459F-C4C2-7F05-3424A8904007}"/>
-              </a:ext>
-            </a:extLst>
-          </p:cNvPr>
-          <p:cNvSpPr txBox="1"/>
-          <p:nvPr/>
-        </p:nvSpPr>
-        <p:spPr>
-          <a:xfrm>
-            <a:off x="1383393" y="4433675"/>
-            <a:ext cx="2431143" cy="400110"/>
-          </a:xfrm>
-          <a:prstGeom prst="rect">
-            <a:avLst/>
-          </a:prstGeom>
-          <a:noFill/>
-        </p:spPr>
-        <p:txBody>
-          <a:bodyPr wrap="square">
-            <a:spAutoFit/>
-          </a:bodyPr>
-          <a:lstStyle/>
-          <a:p>
-            <a:pPr algn="ctr"/>
-            <a:r>
-              <a:rPr lang="de-DE" sz="1000" dirty="0" err="1"/>
-              <a:t>oobConnectionCallback</a:t>
-            </a:r>
-            <a:r>
-              <a:rPr lang="de-DE" sz="1000" dirty="0"/>
-              <a:t>. </a:t>
-            </a:r>
-            <a:r>
-              <a:rPr lang="de-DE" sz="1000" dirty="0" err="1"/>
-              <a:t>startMeasuringOrder</a:t>
-            </a:r>
-            <a:r>
-              <a:rPr lang="de-DE" sz="1000" dirty="0"/>
-              <a:t>()</a:t>
-            </a:r>
-          </a:p>
-        </p:txBody>
-      </p:sp>
-      <p:sp>
-        <p:nvSpPr>
-          <p:cNvPr id="64" name="Textfeld 63">
-            <a:extLst>
-              <a:ext uri="{FF2B5EF4-FFF2-40B4-BE49-F238E27FC236}">
-                <a16:creationId xmlns:a16="http://schemas.microsoft.com/office/drawing/2014/main" id="{F5947DA8-CE61-D516-275E-5E349C4F760A}"/>
-              </a:ext>
-            </a:extLst>
-          </p:cNvPr>
-          <p:cNvSpPr txBox="1"/>
-          <p:nvPr/>
-        </p:nvSpPr>
-        <p:spPr>
-          <a:xfrm>
-            <a:off x="7970609" y="3941495"/>
-            <a:ext cx="2434773" cy="246221"/>
-          </a:xfrm>
-          <a:prstGeom prst="rect">
-            <a:avLst/>
-          </a:prstGeom>
-          <a:noFill/>
-        </p:spPr>
-        <p:txBody>
-          <a:bodyPr wrap="square" rtlCol="0">
-            <a:spAutoFit/>
-          </a:bodyPr>
-          <a:lstStyle/>
-          <a:p>
-            <a:pPr algn="ctr"/>
-            <a:r>
-              <a:rPr lang="de-DE" sz="1000" dirty="0" err="1"/>
-              <a:t>oobConnector.startMeasuring</a:t>
-            </a:r>
-            <a:r>
-              <a:rPr lang="de-DE" sz="1000" dirty="0"/>
-              <a:t>()</a:t>
-            </a:r>
-          </a:p>
-        </p:txBody>
-      </p:sp>
       <p:sp>
         <p:nvSpPr>
           <p:cNvPr id="66" name="Textfeld 65">
@@ -5168,45 +4993,6 @@
           </a:p>
         </p:txBody>
       </p:sp>
-      <p:sp>
-        <p:nvSpPr>
-          <p:cNvPr id="27" name="Textfeld 26">
-            <a:extLst>
-              <a:ext uri="{FF2B5EF4-FFF2-40B4-BE49-F238E27FC236}">
-                <a16:creationId xmlns:a16="http://schemas.microsoft.com/office/drawing/2014/main" id="{78545669-2938-BDAA-6D34-6C11D23F4FA1}"/>
-              </a:ext>
-            </a:extLst>
-          </p:cNvPr>
-          <p:cNvSpPr txBox="1"/>
-          <p:nvPr/>
-        </p:nvSpPr>
-        <p:spPr>
-          <a:xfrm>
-            <a:off x="1651452" y="2620126"/>
-            <a:ext cx="2434773" cy="246221"/>
-          </a:xfrm>
-          <a:prstGeom prst="rect">
-            <a:avLst/>
-          </a:prstGeom>
-          <a:noFill/>
-        </p:spPr>
-        <p:txBody>
-          <a:bodyPr wrap="square" rtlCol="0">
-            <a:spAutoFit/>
-          </a:bodyPr>
-          <a:lstStyle/>
-          <a:p>
-            <a:r>
-              <a:rPr lang="de-DE" sz="1000" dirty="0" err="1"/>
-              <a:t>oobConnector.stopMeasuring</a:t>
-            </a:r>
-            <a:r>
-              <a:rPr lang="de-DE" sz="1000" dirty="0"/>
-              <a:t>()</a:t>
-            </a:r>
-          </a:p>
-        </p:txBody>
-      </p:sp>
       <p:cxnSp>
         <p:nvCxnSpPr>
           <p:cNvPr id="29" name="Gerade Verbindung mit Pfeil 28">
@@ -5365,54 +5151,6 @@
               <a:t>package</a:t>
             </a:r>
             <a:endParaRPr lang="de-DE" sz="1000" dirty="0"/>
-          </a:p>
-        </p:txBody>
-      </p:sp>
-      <p:sp>
-        <p:nvSpPr>
-          <p:cNvPr id="39" name="Textfeld 38">
-            <a:extLst>
-              <a:ext uri="{FF2B5EF4-FFF2-40B4-BE49-F238E27FC236}">
-                <a16:creationId xmlns:a16="http://schemas.microsoft.com/office/drawing/2014/main" id="{53855DCC-5505-6E1D-CB9D-1C0641A7C7BC}"/>
-              </a:ext>
-            </a:extLst>
-          </p:cNvPr>
-          <p:cNvSpPr txBox="1"/>
-          <p:nvPr/>
-        </p:nvSpPr>
-        <p:spPr>
-          <a:xfrm>
-            <a:off x="7945209" y="2851832"/>
-            <a:ext cx="2434773" cy="400110"/>
-          </a:xfrm>
-          <a:prstGeom prst="rect">
-            <a:avLst/>
-          </a:prstGeom>
-          <a:noFill/>
-        </p:spPr>
-        <p:txBody>
-          <a:bodyPr wrap="square" rtlCol="0">
-            <a:spAutoFit/>
-          </a:bodyPr>
-          <a:lstStyle/>
-          <a:p>
-            <a:pPr algn="ctr"/>
-            <a:r>
-              <a:rPr lang="de-DE" sz="1000" dirty="0" err="1"/>
-              <a:t>oobConnectionCallback</a:t>
-            </a:r>
-            <a:r>
-              <a:rPr lang="de-DE" sz="1000" dirty="0"/>
-              <a:t>. </a:t>
-            </a:r>
-            <a:r>
-              <a:rPr lang="de-DE" sz="1000" dirty="0" err="1"/>
-              <a:t>stopMeasuring</a:t>
-            </a:r>
-            <a:r>
-              <a:rPr lang="de-DE" sz="1000" dirty="0"/>
-              <a:t>()</a:t>
-            </a:r>
           </a:p>
         </p:txBody>
       </p:sp>
@@ -6376,10 +6114,10 @@
       </p:sp>
       <p:sp>
         <p:nvSpPr>
-          <p:cNvPr id="80" name="Textfeld 79">
-            <a:extLst>
-              <a:ext uri="{FF2B5EF4-FFF2-40B4-BE49-F238E27FC236}">
-                <a16:creationId xmlns:a16="http://schemas.microsoft.com/office/drawing/2014/main" id="{B6FAFB90-4595-7CF5-EF25-13A29E10E6F2}"/>
+          <p:cNvPr id="82" name="Textfeld 81">
+            <a:extLst>
+              <a:ext uri="{FF2B5EF4-FFF2-40B4-BE49-F238E27FC236}">
+                <a16:creationId xmlns:a16="http://schemas.microsoft.com/office/drawing/2014/main" id="{5E0B938D-F1C1-5FCE-74C4-4613A9137C81}"/>
               </a:ext>
             </a:extLst>
           </p:cNvPr>
@@ -6388,7 +6126,7 @@
         </p:nvSpPr>
         <p:spPr>
           <a:xfrm>
-            <a:off x="7991476" y="3822700"/>
+            <a:off x="4681309" y="4015198"/>
             <a:ext cx="2434773" cy="246221"/>
           </a:xfrm>
           <a:prstGeom prst="rect">
@@ -6404,46 +6142,6 @@
           <a:p>
             <a:pPr algn="ctr"/>
             <a:r>
-              <a:rPr lang="de-DE" sz="1000" dirty="0" err="1"/>
-              <a:t>oobConnector.shareResult</a:t>
-            </a:r>
-            <a:r>
-              <a:rPr lang="de-DE" sz="1000" dirty="0"/>
-              <a:t>()</a:t>
-            </a:r>
-          </a:p>
-        </p:txBody>
-      </p:sp>
-      <p:sp>
-        <p:nvSpPr>
-          <p:cNvPr id="82" name="Textfeld 81">
-            <a:extLst>
-              <a:ext uri="{FF2B5EF4-FFF2-40B4-BE49-F238E27FC236}">
-                <a16:creationId xmlns:a16="http://schemas.microsoft.com/office/drawing/2014/main" id="{5E0B938D-F1C1-5FCE-74C4-4613A9137C81}"/>
-              </a:ext>
-            </a:extLst>
-          </p:cNvPr>
-          <p:cNvSpPr txBox="1"/>
-          <p:nvPr/>
-        </p:nvSpPr>
-        <p:spPr>
-          <a:xfrm>
-            <a:off x="4681309" y="4015198"/>
-            <a:ext cx="2434773" cy="246221"/>
-          </a:xfrm>
-          <a:prstGeom prst="rect">
-            <a:avLst/>
-          </a:prstGeom>
-          <a:noFill/>
-        </p:spPr>
-        <p:txBody>
-          <a:bodyPr wrap="square" rtlCol="0">
-            <a:spAutoFit/>
-          </a:bodyPr>
-          <a:lstStyle/>
-          <a:p>
-            <a:pPr algn="ctr"/>
-            <a:r>
               <a:rPr lang="de-DE" sz="1000" dirty="0"/>
               <a:t>SHARED_RESULT </a:t>
             </a:r>
@@ -6452,57 +6150,6 @@
               <a:t>package</a:t>
             </a:r>
             <a:endParaRPr lang="de-DE" sz="1000" dirty="0"/>
-          </a:p>
-        </p:txBody>
-      </p:sp>
-      <p:sp>
-        <p:nvSpPr>
-          <p:cNvPr id="84" name="Textfeld 83">
-            <a:extLst>
-              <a:ext uri="{FF2B5EF4-FFF2-40B4-BE49-F238E27FC236}">
-                <a16:creationId xmlns:a16="http://schemas.microsoft.com/office/drawing/2014/main" id="{1202A08E-7C62-B946-4A55-655F50BFCF02}"/>
-              </a:ext>
-            </a:extLst>
-          </p:cNvPr>
-          <p:cNvSpPr txBox="1"/>
-          <p:nvPr/>
-        </p:nvSpPr>
-        <p:spPr>
-          <a:xfrm>
-            <a:off x="1524454" y="4159953"/>
-            <a:ext cx="2431143" cy="400110"/>
-          </a:xfrm>
-          <a:prstGeom prst="rect">
-            <a:avLst/>
-          </a:prstGeom>
-          <a:noFill/>
-        </p:spPr>
-        <p:txBody>
-          <a:bodyPr wrap="square">
-            <a:spAutoFit/>
-          </a:bodyPr>
-          <a:lstStyle/>
-          <a:p>
-            <a:pPr algn="ctr"/>
-            <a:r>
-              <a:rPr lang="de-DE" sz="1000" dirty="0" err="1"/>
-              <a:t>oobConnectionCallback</a:t>
-            </a:r>
-            <a:r>
-              <a:rPr lang="de-DE" sz="1000" dirty="0"/>
-              <a:t>.</a:t>
-            </a:r>
-          </a:p>
-          <a:p>
-            <a:pPr algn="ctr"/>
-            <a:r>
-              <a:rPr lang="de-DE" sz="1000" dirty="0" err="1"/>
-              <a:t>sharedResult</a:t>
-            </a:r>
-            <a:r>
-              <a:rPr lang="de-DE" sz="1000" dirty="0"/>
-              <a:t>()</a:t>
-            </a:r>
           </a:p>
         </p:txBody>
       </p:sp>
